--- a/Blank/Lecture_05_ Tokenization_03.pptx
+++ b/Blank/Lecture_05_ Tokenization_03.pptx
@@ -267,7 +267,7 @@
   </p:defaultTextStyle>
   <p:extLst>
     <p:ext uri="GoogleSlidesCustomDataVersion2">
-      <go:slidesCustomData xmlns:go="http://customooxmlschemas.google.com/" r:id="rId30" roundtripDataSignature="AMtx7mi4T2+YXSeykhj9D+Gkhd3lghAE0Q=="/>
+      <go:slidesCustomData xmlns:go="http://customooxmlschemas.google.com/" r:id="rId30" roundtripDataSignature="AMtx7mjBcaVylMX+7tKAflK6s1IQ3s5NzQ=="/>
     </p:ext>
   </p:extLst>
 </p:presentation>
@@ -1523,7 +1523,7 @@
   <p:cSld>
     <p:spTree>
       <p:nvGrpSpPr>
-        <p:cNvPr id="160" name="Shape 160"/>
+        <p:cNvPr id="166" name="Shape 166"/>
         <p:cNvGrpSpPr/>
         <p:nvPr/>
       </p:nvGrpSpPr>
@@ -1537,7 +1537,7 @@
       </p:grpSpPr>
       <p:sp>
         <p:nvSpPr>
-          <p:cNvPr id="161" name="Google Shape;161;g3b8409de4d6_0_108:notes"/>
+          <p:cNvPr id="167" name="Google Shape;167;g3b8409de4d6_0_108:notes"/>
           <p:cNvSpPr/>
           <p:nvPr>
             <p:ph idx="2" type="sldImg"/>
@@ -1582,7 +1582,7 @@
       </p:sp>
       <p:sp>
         <p:nvSpPr>
-          <p:cNvPr id="162" name="Google Shape;162;g3b8409de4d6_0_108:notes"/>
+          <p:cNvPr id="168" name="Google Shape;168;g3b8409de4d6_0_108:notes"/>
           <p:cNvSpPr txBox="1"/>
           <p:nvPr>
             <p:ph idx="1" type="body"/>
@@ -1640,7 +1640,7 @@
   <p:cSld>
     <p:spTree>
       <p:nvGrpSpPr>
-        <p:cNvPr id="168" name="Shape 168"/>
+        <p:cNvPr id="174" name="Shape 174"/>
         <p:cNvGrpSpPr/>
         <p:nvPr/>
       </p:nvGrpSpPr>
@@ -1654,7 +1654,7 @@
       </p:grpSpPr>
       <p:sp>
         <p:nvSpPr>
-          <p:cNvPr id="169" name="Google Shape;169;g3bbeee67e43_0_26:notes"/>
+          <p:cNvPr id="175" name="Google Shape;175;g3bbeee67e43_0_26:notes"/>
           <p:cNvSpPr/>
           <p:nvPr>
             <p:ph idx="2" type="sldImg"/>
@@ -1699,7 +1699,7 @@
       </p:sp>
       <p:sp>
         <p:nvSpPr>
-          <p:cNvPr id="170" name="Google Shape;170;g3bbeee67e43_0_26:notes"/>
+          <p:cNvPr id="176" name="Google Shape;176;g3bbeee67e43_0_26:notes"/>
           <p:cNvSpPr txBox="1"/>
           <p:nvPr>
             <p:ph idx="1" type="body"/>
@@ -1757,7 +1757,7 @@
   <p:cSld>
     <p:spTree>
       <p:nvGrpSpPr>
-        <p:cNvPr id="173" name="Shape 173"/>
+        <p:cNvPr id="179" name="Shape 179"/>
         <p:cNvGrpSpPr/>
         <p:nvPr/>
       </p:nvGrpSpPr>
@@ -1771,7 +1771,7 @@
       </p:grpSpPr>
       <p:sp>
         <p:nvSpPr>
-          <p:cNvPr id="174" name="Google Shape;174;g3bbeee67e43_0_44:notes"/>
+          <p:cNvPr id="180" name="Google Shape;180;g3bbeee67e43_0_44:notes"/>
           <p:cNvSpPr/>
           <p:nvPr>
             <p:ph idx="2" type="sldImg"/>
@@ -1806,7 +1806,7 @@
       </p:sp>
       <p:sp>
         <p:nvSpPr>
-          <p:cNvPr id="175" name="Google Shape;175;g3bbeee67e43_0_44:notes"/>
+          <p:cNvPr id="181" name="Google Shape;181;g3bbeee67e43_0_44:notes"/>
           <p:cNvSpPr txBox="1"/>
           <p:nvPr>
             <p:ph idx="1" type="body"/>
@@ -1856,7 +1856,7 @@
   <p:cSld>
     <p:spTree>
       <p:nvGrpSpPr>
-        <p:cNvPr id="181" name="Shape 181"/>
+        <p:cNvPr id="187" name="Shape 187"/>
         <p:cNvGrpSpPr/>
         <p:nvPr/>
       </p:nvGrpSpPr>
@@ -1870,7 +1870,7 @@
       </p:grpSpPr>
       <p:sp>
         <p:nvSpPr>
-          <p:cNvPr id="182" name="Google Shape;182;g3bbeee67e43_0_53:notes"/>
+          <p:cNvPr id="188" name="Google Shape;188;g3bbeee67e43_0_53:notes"/>
           <p:cNvSpPr/>
           <p:nvPr>
             <p:ph idx="2" type="sldImg"/>
@@ -1905,7 +1905,7 @@
       </p:sp>
       <p:sp>
         <p:nvSpPr>
-          <p:cNvPr id="183" name="Google Shape;183;g3bbeee67e43_0_53:notes"/>
+          <p:cNvPr id="189" name="Google Shape;189;g3bbeee67e43_0_53:notes"/>
           <p:cNvSpPr txBox="1"/>
           <p:nvPr>
             <p:ph idx="1" type="body"/>
@@ -1955,7 +1955,7 @@
   <p:cSld>
     <p:spTree>
       <p:nvGrpSpPr>
-        <p:cNvPr id="203" name="Shape 203"/>
+        <p:cNvPr id="209" name="Shape 209"/>
         <p:cNvGrpSpPr/>
         <p:nvPr/>
       </p:nvGrpSpPr>
@@ -1969,7 +1969,7 @@
       </p:grpSpPr>
       <p:sp>
         <p:nvSpPr>
-          <p:cNvPr id="204" name="Google Shape;204;g3bbeee67e43_0_98:notes"/>
+          <p:cNvPr id="210" name="Google Shape;210;g3bbeee67e43_0_98:notes"/>
           <p:cNvSpPr/>
           <p:nvPr>
             <p:ph idx="2" type="sldImg"/>
@@ -2004,7 +2004,7 @@
       </p:sp>
       <p:sp>
         <p:nvSpPr>
-          <p:cNvPr id="205" name="Google Shape;205;g3bbeee67e43_0_98:notes"/>
+          <p:cNvPr id="211" name="Google Shape;211;g3bbeee67e43_0_98:notes"/>
           <p:cNvSpPr txBox="1"/>
           <p:nvPr>
             <p:ph idx="1" type="body"/>
@@ -2171,7 +2171,7 @@
   <p:cSld>
     <p:spTree>
       <p:nvGrpSpPr>
-        <p:cNvPr id="209" name="Shape 209"/>
+        <p:cNvPr id="215" name="Shape 215"/>
         <p:cNvGrpSpPr/>
         <p:nvPr/>
       </p:nvGrpSpPr>
@@ -2185,7 +2185,7 @@
       </p:grpSpPr>
       <p:sp>
         <p:nvSpPr>
-          <p:cNvPr id="210" name="Google Shape;210;g3bbeee67e43_0_137:notes"/>
+          <p:cNvPr id="216" name="Google Shape;216;g3bbeee67e43_0_137:notes"/>
           <p:cNvSpPr/>
           <p:nvPr>
             <p:ph idx="2" type="sldImg"/>
@@ -2230,7 +2230,7 @@
       </p:sp>
       <p:sp>
         <p:nvSpPr>
-          <p:cNvPr id="211" name="Google Shape;211;g3bbeee67e43_0_137:notes"/>
+          <p:cNvPr id="217" name="Google Shape;217;g3bbeee67e43_0_137:notes"/>
           <p:cNvSpPr txBox="1"/>
           <p:nvPr>
             <p:ph idx="1" type="body"/>
@@ -2288,7 +2288,7 @@
   <p:cSld>
     <p:spTree>
       <p:nvGrpSpPr>
-        <p:cNvPr id="215" name="Shape 215"/>
+        <p:cNvPr id="221" name="Shape 221"/>
         <p:cNvGrpSpPr/>
         <p:nvPr/>
       </p:nvGrpSpPr>
@@ -2302,7 +2302,7 @@
       </p:grpSpPr>
       <p:sp>
         <p:nvSpPr>
-          <p:cNvPr id="216" name="Google Shape;216;g3bbeee67e43_0_126:notes"/>
+          <p:cNvPr id="222" name="Google Shape;222;g3bbeee67e43_0_126:notes"/>
           <p:cNvSpPr/>
           <p:nvPr>
             <p:ph idx="2" type="sldImg"/>
@@ -2347,7 +2347,7 @@
       </p:sp>
       <p:sp>
         <p:nvSpPr>
-          <p:cNvPr id="217" name="Google Shape;217;g3bbeee67e43_0_126:notes"/>
+          <p:cNvPr id="223" name="Google Shape;223;g3bbeee67e43_0_126:notes"/>
           <p:cNvSpPr txBox="1"/>
           <p:nvPr>
             <p:ph idx="1" type="body"/>
@@ -2405,7 +2405,7 @@
   <p:cSld>
     <p:spTree>
       <p:nvGrpSpPr>
-        <p:cNvPr id="221" name="Shape 221"/>
+        <p:cNvPr id="227" name="Shape 227"/>
         <p:cNvGrpSpPr/>
         <p:nvPr/>
       </p:nvGrpSpPr>
@@ -2419,7 +2419,7 @@
       </p:grpSpPr>
       <p:sp>
         <p:nvSpPr>
-          <p:cNvPr id="222" name="Google Shape;222;g3bbeee67e43_0_132:notes"/>
+          <p:cNvPr id="228" name="Google Shape;228;g3bbeee67e43_0_132:notes"/>
           <p:cNvSpPr/>
           <p:nvPr>
             <p:ph idx="2" type="sldImg"/>
@@ -2464,7 +2464,7 @@
       </p:sp>
       <p:sp>
         <p:nvSpPr>
-          <p:cNvPr id="223" name="Google Shape;223;g3bbeee67e43_0_132:notes"/>
+          <p:cNvPr id="229" name="Google Shape;229;g3bbeee67e43_0_132:notes"/>
           <p:cNvSpPr txBox="1"/>
           <p:nvPr>
             <p:ph idx="1" type="body"/>
@@ -2522,7 +2522,7 @@
   <p:cSld>
     <p:spTree>
       <p:nvGrpSpPr>
-        <p:cNvPr id="227" name="Shape 227"/>
+        <p:cNvPr id="233" name="Shape 233"/>
         <p:cNvGrpSpPr/>
         <p:nvPr/>
       </p:nvGrpSpPr>
@@ -2536,7 +2536,7 @@
       </p:grpSpPr>
       <p:sp>
         <p:nvSpPr>
-          <p:cNvPr id="228" name="Google Shape;228;g3bbeee67e43_0_147:notes"/>
+          <p:cNvPr id="234" name="Google Shape;234;g3bbeee67e43_0_147:notes"/>
           <p:cNvSpPr/>
           <p:nvPr>
             <p:ph idx="2" type="sldImg"/>
@@ -2581,7 +2581,7 @@
       </p:sp>
       <p:sp>
         <p:nvSpPr>
-          <p:cNvPr id="229" name="Google Shape;229;g3bbeee67e43_0_147:notes"/>
+          <p:cNvPr id="235" name="Google Shape;235;g3bbeee67e43_0_147:notes"/>
           <p:cNvSpPr txBox="1"/>
           <p:nvPr>
             <p:ph idx="1" type="body"/>
@@ -2639,7 +2639,7 @@
   <p:cSld>
     <p:spTree>
       <p:nvGrpSpPr>
-        <p:cNvPr id="233" name="Shape 233"/>
+        <p:cNvPr id="239" name="Shape 239"/>
         <p:cNvGrpSpPr/>
         <p:nvPr/>
       </p:nvGrpSpPr>
@@ -2653,7 +2653,7 @@
       </p:grpSpPr>
       <p:sp>
         <p:nvSpPr>
-          <p:cNvPr id="234" name="Google Shape;234;g3bbeee67e43_0_142:notes"/>
+          <p:cNvPr id="240" name="Google Shape;240;g3bbeee67e43_0_142:notes"/>
           <p:cNvSpPr/>
           <p:nvPr>
             <p:ph idx="2" type="sldImg"/>
@@ -2698,7 +2698,7 @@
       </p:sp>
       <p:sp>
         <p:nvSpPr>
-          <p:cNvPr id="235" name="Google Shape;235;g3bbeee67e43_0_142:notes"/>
+          <p:cNvPr id="241" name="Google Shape;241;g3bbeee67e43_0_142:notes"/>
           <p:cNvSpPr txBox="1"/>
           <p:nvPr>
             <p:ph idx="1" type="body"/>
@@ -2756,7 +2756,7 @@
   <p:cSld>
     <p:spTree>
       <p:nvGrpSpPr>
-        <p:cNvPr id="239" name="Shape 239"/>
+        <p:cNvPr id="245" name="Shape 245"/>
         <p:cNvGrpSpPr/>
         <p:nvPr/>
       </p:nvGrpSpPr>
@@ -2770,7 +2770,7 @@
       </p:grpSpPr>
       <p:sp>
         <p:nvSpPr>
-          <p:cNvPr id="240" name="Google Shape;240;g3bbeee67e43_0_93:notes"/>
+          <p:cNvPr id="246" name="Google Shape;246;g3bbeee67e43_0_93:notes"/>
           <p:cNvSpPr/>
           <p:nvPr>
             <p:ph idx="2" type="sldImg"/>
@@ -2805,7 +2805,7 @@
       </p:sp>
       <p:sp>
         <p:nvSpPr>
-          <p:cNvPr id="241" name="Google Shape;241;g3bbeee67e43_0_93:notes"/>
+          <p:cNvPr id="247" name="Google Shape;247;g3bbeee67e43_0_93:notes"/>
           <p:cNvSpPr txBox="1"/>
           <p:nvPr>
             <p:ph idx="1" type="body"/>
@@ -10799,7 +10799,19 @@
                 <a:cs typeface="Consolas"/>
                 <a:sym typeface="Consolas"/>
               </a:rPr>
-              <a:t>lab 01</a:t>
+              <a:t>L</a:t>
+            </a:r>
+            <a:r>
+              <a:rPr lang="en">
+                <a:solidFill>
+                  <a:srgbClr val="DCB439"/>
+                </a:solidFill>
+                <a:latin typeface="Consolas"/>
+                <a:ea typeface="Consolas"/>
+                <a:cs typeface="Consolas"/>
+                <a:sym typeface="Consolas"/>
+              </a:rPr>
+              <a:t>ab 01</a:t>
             </a:r>
             <a:endParaRPr>
               <a:solidFill>
@@ -12062,6 +12074,318 @@
           </a:ln>
         </p:spPr>
       </p:cxnSp>
+      <p:sp>
+        <p:nvSpPr>
+          <p:cNvPr id="160" name="Google Shape;160;g3bbeee67e43_0_30"/>
+          <p:cNvSpPr/>
+          <p:nvPr/>
+        </p:nvSpPr>
+        <p:spPr>
+          <a:xfrm>
+            <a:off x="3277225" y="5186563"/>
+            <a:ext cx="678300" cy="226800"/>
+          </a:xfrm>
+          <a:prstGeom prst="rect">
+            <a:avLst/>
+          </a:prstGeom>
+          <a:noFill/>
+          <a:ln cap="flat" cmpd="sng" w="38100">
+            <a:solidFill>
+              <a:srgbClr val="A31515"/>
+            </a:solidFill>
+            <a:prstDash val="solid"/>
+            <a:round/>
+            <a:headEnd len="sm" w="sm" type="none"/>
+            <a:tailEnd len="sm" w="sm" type="none"/>
+          </a:ln>
+        </p:spPr>
+        <p:txBody>
+          <a:bodyPr anchorCtr="0" anchor="ctr" bIns="40675" lIns="40675" spcFirstLastPara="1" rIns="40675" wrap="square" tIns="40675">
+            <a:noAutofit/>
+          </a:bodyPr>
+          <a:lstStyle/>
+          <a:p>
+            <a:pPr indent="0" lvl="0" marL="0" marR="0" rtl="0" algn="ctr">
+              <a:lnSpc>
+                <a:spcPct val="100000"/>
+              </a:lnSpc>
+              <a:spcBef>
+                <a:spcPts val="0"/>
+              </a:spcBef>
+              <a:spcAft>
+                <a:spcPts val="0"/>
+              </a:spcAft>
+              <a:buClr>
+                <a:srgbClr val="000000"/>
+              </a:buClr>
+              <a:buSzPts val="623"/>
+              <a:buFont typeface="Arial"/>
+              <a:buNone/>
+            </a:pPr>
+            <a:r>
+              <a:t/>
+            </a:r>
+            <a:endParaRPr b="0" i="0" sz="622" u="none" cap="none" strike="noStrike">
+              <a:solidFill>
+                <a:srgbClr val="DCB439"/>
+              </a:solidFill>
+              <a:latin typeface="Arial"/>
+              <a:ea typeface="Arial"/>
+              <a:cs typeface="Arial"/>
+              <a:sym typeface="Arial"/>
+            </a:endParaRPr>
+          </a:p>
+        </p:txBody>
+      </p:sp>
+      <p:sp>
+        <p:nvSpPr>
+          <p:cNvPr id="161" name="Google Shape;161;g3bbeee67e43_0_30"/>
+          <p:cNvSpPr txBox="1"/>
+          <p:nvPr/>
+        </p:nvSpPr>
+        <p:spPr>
+          <a:xfrm>
+            <a:off x="2086125" y="5186563"/>
+            <a:ext cx="725400" cy="226800"/>
+          </a:xfrm>
+          <a:prstGeom prst="rect">
+            <a:avLst/>
+          </a:prstGeom>
+          <a:noFill/>
+          <a:ln cap="flat" cmpd="sng" w="38100">
+            <a:solidFill>
+              <a:srgbClr val="A31515"/>
+            </a:solidFill>
+            <a:prstDash val="solid"/>
+            <a:round/>
+            <a:headEnd len="sm" w="sm" type="none"/>
+            <a:tailEnd len="sm" w="sm" type="none"/>
+          </a:ln>
+        </p:spPr>
+        <p:txBody>
+          <a:bodyPr anchorCtr="0" anchor="ctr" bIns="91425" lIns="91425" spcFirstLastPara="1" rIns="91425" wrap="square" tIns="91425">
+            <a:noAutofit/>
+          </a:bodyPr>
+          <a:lstStyle/>
+          <a:p>
+            <a:pPr indent="0" lvl="0" marL="0" rtl="0" algn="ctr">
+              <a:spcBef>
+                <a:spcPts val="0"/>
+              </a:spcBef>
+              <a:spcAft>
+                <a:spcPts val="0"/>
+              </a:spcAft>
+              <a:buNone/>
+            </a:pPr>
+            <a:r>
+              <a:rPr b="1" lang="en" sz="1200">
+                <a:solidFill>
+                  <a:srgbClr val="DCB439"/>
+                </a:solidFill>
+                <a:latin typeface="Consolas"/>
+                <a:ea typeface="Consolas"/>
+                <a:cs typeface="Consolas"/>
+                <a:sym typeface="Consolas"/>
+              </a:rPr>
+              <a:t>Lab 04</a:t>
+            </a:r>
+            <a:endParaRPr b="1" sz="1200">
+              <a:solidFill>
+                <a:srgbClr val="DCB439"/>
+              </a:solidFill>
+              <a:latin typeface="Consolas"/>
+              <a:ea typeface="Consolas"/>
+              <a:cs typeface="Consolas"/>
+              <a:sym typeface="Consolas"/>
+            </a:endParaRPr>
+          </a:p>
+        </p:txBody>
+      </p:sp>
+      <p:cxnSp>
+        <p:nvCxnSpPr>
+          <p:cNvPr id="162" name="Google Shape;162;g3bbeee67e43_0_30"/>
+          <p:cNvCxnSpPr>
+            <a:stCxn id="161" idx="3"/>
+            <a:endCxn id="160" idx="1"/>
+          </p:cNvCxnSpPr>
+          <p:nvPr/>
+        </p:nvCxnSpPr>
+        <p:spPr>
+          <a:xfrm>
+            <a:off x="2811525" y="5299963"/>
+            <a:ext cx="465600" cy="0"/>
+          </a:xfrm>
+          <a:prstGeom prst="straightConnector1">
+            <a:avLst/>
+          </a:prstGeom>
+          <a:noFill/>
+          <a:ln cap="flat" cmpd="sng" w="19050">
+            <a:solidFill>
+              <a:srgbClr val="A31515"/>
+            </a:solidFill>
+            <a:prstDash val="solid"/>
+            <a:round/>
+            <a:headEnd len="med" w="med" type="none"/>
+            <a:tailEnd len="med" w="med" type="none"/>
+          </a:ln>
+        </p:spPr>
+      </p:cxnSp>
+      <p:sp>
+        <p:nvSpPr>
+          <p:cNvPr id="163" name="Google Shape;163;g3bbeee67e43_0_30"/>
+          <p:cNvSpPr/>
+          <p:nvPr/>
+        </p:nvSpPr>
+        <p:spPr>
+          <a:xfrm>
+            <a:off x="2946125" y="3766950"/>
+            <a:ext cx="1375500" cy="415800"/>
+          </a:xfrm>
+          <a:prstGeom prst="rect">
+            <a:avLst/>
+          </a:prstGeom>
+          <a:noFill/>
+          <a:ln cap="flat" cmpd="sng" w="38100">
+            <a:solidFill>
+              <a:srgbClr val="A31515"/>
+            </a:solidFill>
+            <a:prstDash val="solid"/>
+            <a:round/>
+            <a:headEnd len="sm" w="sm" type="none"/>
+            <a:tailEnd len="sm" w="sm" type="none"/>
+          </a:ln>
+        </p:spPr>
+        <p:txBody>
+          <a:bodyPr anchorCtr="0" anchor="ctr" bIns="40675" lIns="40675" spcFirstLastPara="1" rIns="40675" wrap="square" tIns="40675">
+            <a:noAutofit/>
+          </a:bodyPr>
+          <a:lstStyle/>
+          <a:p>
+            <a:pPr indent="0" lvl="0" marL="0" marR="0" rtl="0" algn="ctr">
+              <a:lnSpc>
+                <a:spcPct val="100000"/>
+              </a:lnSpc>
+              <a:spcBef>
+                <a:spcPts val="0"/>
+              </a:spcBef>
+              <a:spcAft>
+                <a:spcPts val="0"/>
+              </a:spcAft>
+              <a:buClr>
+                <a:srgbClr val="000000"/>
+              </a:buClr>
+              <a:buSzPts val="623"/>
+              <a:buFont typeface="Arial"/>
+              <a:buNone/>
+            </a:pPr>
+            <a:r>
+              <a:t/>
+            </a:r>
+            <a:endParaRPr b="0" i="0" sz="622" u="none" cap="none" strike="noStrike">
+              <a:solidFill>
+                <a:srgbClr val="DCB439"/>
+              </a:solidFill>
+              <a:latin typeface="Arial"/>
+              <a:ea typeface="Arial"/>
+              <a:cs typeface="Arial"/>
+              <a:sym typeface="Arial"/>
+            </a:endParaRPr>
+          </a:p>
+        </p:txBody>
+      </p:sp>
+      <p:sp>
+        <p:nvSpPr>
+          <p:cNvPr id="164" name="Google Shape;164;g3bbeee67e43_0_30"/>
+          <p:cNvSpPr txBox="1"/>
+          <p:nvPr/>
+        </p:nvSpPr>
+        <p:spPr>
+          <a:xfrm>
+            <a:off x="1949775" y="3861450"/>
+            <a:ext cx="725400" cy="226800"/>
+          </a:xfrm>
+          <a:prstGeom prst="rect">
+            <a:avLst/>
+          </a:prstGeom>
+          <a:noFill/>
+          <a:ln cap="flat" cmpd="sng" w="38100">
+            <a:solidFill>
+              <a:srgbClr val="A31515"/>
+            </a:solidFill>
+            <a:prstDash val="solid"/>
+            <a:round/>
+            <a:headEnd len="sm" w="sm" type="none"/>
+            <a:tailEnd len="sm" w="sm" type="none"/>
+          </a:ln>
+        </p:spPr>
+        <p:txBody>
+          <a:bodyPr anchorCtr="0" anchor="ctr" bIns="91425" lIns="91425" spcFirstLastPara="1" rIns="91425" wrap="square" tIns="91425">
+            <a:noAutofit/>
+          </a:bodyPr>
+          <a:lstStyle/>
+          <a:p>
+            <a:pPr indent="0" lvl="0" marL="0" rtl="0" algn="ctr">
+              <a:spcBef>
+                <a:spcPts val="0"/>
+              </a:spcBef>
+              <a:spcAft>
+                <a:spcPts val="0"/>
+              </a:spcAft>
+              <a:buNone/>
+            </a:pPr>
+            <a:r>
+              <a:rPr b="1" lang="en" sz="1200">
+                <a:solidFill>
+                  <a:srgbClr val="DCB439"/>
+                </a:solidFill>
+                <a:latin typeface="Consolas"/>
+                <a:ea typeface="Consolas"/>
+                <a:cs typeface="Consolas"/>
+                <a:sym typeface="Consolas"/>
+              </a:rPr>
+              <a:t>Lab 05</a:t>
+            </a:r>
+            <a:endParaRPr b="1" sz="1200">
+              <a:solidFill>
+                <a:srgbClr val="DCB439"/>
+              </a:solidFill>
+              <a:latin typeface="Consolas"/>
+              <a:ea typeface="Consolas"/>
+              <a:cs typeface="Consolas"/>
+              <a:sym typeface="Consolas"/>
+            </a:endParaRPr>
+          </a:p>
+        </p:txBody>
+      </p:sp>
+      <p:cxnSp>
+        <p:nvCxnSpPr>
+          <p:cNvPr id="165" name="Google Shape;165;g3bbeee67e43_0_30"/>
+          <p:cNvCxnSpPr>
+            <a:stCxn id="164" idx="3"/>
+            <a:endCxn id="163" idx="1"/>
+          </p:cNvCxnSpPr>
+          <p:nvPr/>
+        </p:nvCxnSpPr>
+        <p:spPr>
+          <a:xfrm>
+            <a:off x="2675175" y="3974850"/>
+            <a:ext cx="270900" cy="0"/>
+          </a:xfrm>
+          <a:prstGeom prst="straightConnector1">
+            <a:avLst/>
+          </a:prstGeom>
+          <a:noFill/>
+          <a:ln cap="flat" cmpd="sng" w="19050">
+            <a:solidFill>
+              <a:srgbClr val="A31515"/>
+            </a:solidFill>
+            <a:prstDash val="solid"/>
+            <a:round/>
+            <a:headEnd len="med" w="med" type="none"/>
+            <a:tailEnd len="med" w="med" type="none"/>
+          </a:ln>
+        </p:spPr>
+      </p:cxnSp>
     </p:spTree>
   </p:cSld>
   <p:clrMapOvr>
@@ -12075,7 +12399,7 @@
   <p:cSld>
     <p:spTree>
       <p:nvGrpSpPr>
-        <p:cNvPr id="163" name="Shape 163"/>
+        <p:cNvPr id="169" name="Shape 169"/>
         <p:cNvGrpSpPr/>
         <p:nvPr/>
       </p:nvGrpSpPr>
@@ -12089,7 +12413,7 @@
       </p:grpSpPr>
       <p:sp>
         <p:nvSpPr>
-          <p:cNvPr id="164" name="Google Shape;164;g3b8409de4d6_0_108"/>
+          <p:cNvPr id="170" name="Google Shape;170;g3b8409de4d6_0_108"/>
           <p:cNvSpPr txBox="1"/>
           <p:nvPr>
             <p:ph type="title"/>
@@ -12137,7 +12461,7 @@
       </p:sp>
       <p:sp>
         <p:nvSpPr>
-          <p:cNvPr id="165" name="Google Shape;165;g3b8409de4d6_0_108"/>
+          <p:cNvPr id="171" name="Google Shape;171;g3b8409de4d6_0_108"/>
           <p:cNvSpPr txBox="1"/>
           <p:nvPr>
             <p:ph idx="1" type="body"/>
@@ -12285,7 +12609,7 @@
       </p:sp>
       <p:pic>
         <p:nvPicPr>
-          <p:cNvPr id="166" name="Google Shape;166;g3b8409de4d6_0_108"/>
+          <p:cNvPr id="172" name="Google Shape;172;g3b8409de4d6_0_108"/>
           <p:cNvPicPr preferRelativeResize="0"/>
           <p:nvPr/>
         </p:nvPicPr>
@@ -12312,7 +12636,7 @@
       </p:pic>
       <p:pic>
         <p:nvPicPr>
-          <p:cNvPr id="167" name="Google Shape;167;g3b8409de4d6_0_108" title="IMG_0529.jpeg"/>
+          <p:cNvPr id="173" name="Google Shape;173;g3b8409de4d6_0_108" title="IMG_0529.jpeg"/>
           <p:cNvPicPr preferRelativeResize="0"/>
           <p:nvPr/>
         </p:nvPicPr>
@@ -12350,7 +12674,7 @@
   <p:cSld>
     <p:spTree>
       <p:nvGrpSpPr>
-        <p:cNvPr id="171" name="Shape 171"/>
+        <p:cNvPr id="177" name="Shape 177"/>
         <p:cNvGrpSpPr/>
         <p:nvPr/>
       </p:nvGrpSpPr>
@@ -12364,7 +12688,7 @@
       </p:grpSpPr>
       <p:sp>
         <p:nvSpPr>
-          <p:cNvPr id="172" name="Google Shape;172;g3bbeee67e43_0_26"/>
+          <p:cNvPr id="178" name="Google Shape;178;g3bbeee67e43_0_26"/>
           <p:cNvSpPr txBox="1"/>
           <p:nvPr>
             <p:ph type="ctrTitle"/>
@@ -12466,7 +12790,7 @@
   <p:cSld>
     <p:spTree>
       <p:nvGrpSpPr>
-        <p:cNvPr id="176" name="Shape 176"/>
+        <p:cNvPr id="182" name="Shape 182"/>
         <p:cNvGrpSpPr/>
         <p:nvPr/>
       </p:nvGrpSpPr>
@@ -12480,7 +12804,7 @@
       </p:grpSpPr>
       <p:sp>
         <p:nvSpPr>
-          <p:cNvPr id="177" name="Google Shape;177;g3bbeee67e43_0_44"/>
+          <p:cNvPr id="183" name="Google Shape;183;g3bbeee67e43_0_44"/>
           <p:cNvSpPr txBox="1"/>
           <p:nvPr>
             <p:ph type="title"/>
@@ -12520,7 +12844,7 @@
       </p:sp>
       <p:sp>
         <p:nvSpPr>
-          <p:cNvPr id="178" name="Google Shape;178;g3bbeee67e43_0_44"/>
+          <p:cNvPr id="184" name="Google Shape;184;g3bbeee67e43_0_44"/>
           <p:cNvSpPr txBox="1"/>
           <p:nvPr>
             <p:ph idx="1" type="body"/>
@@ -12568,7 +12892,7 @@
       </p:sp>
       <p:pic>
         <p:nvPicPr>
-          <p:cNvPr id="179" name="Google Shape;179;g3bbeee67e43_0_44" title="Screenshot 2026-01-27 at 11.03.21 AM.png"/>
+          <p:cNvPr id="185" name="Google Shape;185;g3bbeee67e43_0_44" title="Screenshot 2026-01-27 at 11.03.21 AM.png"/>
           <p:cNvPicPr preferRelativeResize="0"/>
           <p:nvPr/>
         </p:nvPicPr>
@@ -12596,7 +12920,7 @@
       </p:pic>
       <p:pic>
         <p:nvPicPr>
-          <p:cNvPr id="180" name="Google Shape;180;g3bbeee67e43_0_44" title="Screenshot 2026-01-27 at 11.04.18 AM.png"/>
+          <p:cNvPr id="186" name="Google Shape;186;g3bbeee67e43_0_44" title="Screenshot 2026-01-27 at 11.04.18 AM.png"/>
           <p:cNvPicPr preferRelativeResize="0"/>
           <p:nvPr/>
         </p:nvPicPr>
@@ -12635,7 +12959,7 @@
   <p:cSld>
     <p:spTree>
       <p:nvGrpSpPr>
-        <p:cNvPr id="184" name="Shape 184"/>
+        <p:cNvPr id="190" name="Shape 190"/>
         <p:cNvGrpSpPr/>
         <p:nvPr/>
       </p:nvGrpSpPr>
@@ -12649,7 +12973,7 @@
       </p:grpSpPr>
       <p:sp>
         <p:nvSpPr>
-          <p:cNvPr id="185" name="Google Shape;185;g3bbeee67e43_0_53"/>
+          <p:cNvPr id="191" name="Google Shape;191;g3bbeee67e43_0_53"/>
           <p:cNvSpPr txBox="1"/>
           <p:nvPr>
             <p:ph type="title"/>
@@ -12689,7 +13013,7 @@
       </p:sp>
       <p:pic>
         <p:nvPicPr>
-          <p:cNvPr id="186" name="Google Shape;186;g3bbeee67e43_0_53" title="Screenshot 2026-01-27 at 11.06.13 AM.png"/>
+          <p:cNvPr id="192" name="Google Shape;192;g3bbeee67e43_0_53" title="Screenshot 2026-01-27 at 11.06.13 AM.png"/>
           <p:cNvPicPr preferRelativeResize="0"/>
           <p:nvPr/>
         </p:nvPicPr>
@@ -12717,7 +13041,7 @@
       </p:pic>
       <p:pic>
         <p:nvPicPr>
-          <p:cNvPr id="187" name="Google Shape;187;g3bbeee67e43_0_53" title="Screenshot 2026-01-27 at 11.06.43 AM.png"/>
+          <p:cNvPr id="193" name="Google Shape;193;g3bbeee67e43_0_53" title="Screenshot 2026-01-27 at 11.06.43 AM.png"/>
           <p:cNvPicPr preferRelativeResize="0"/>
           <p:nvPr/>
         </p:nvPicPr>
@@ -12745,7 +13069,7 @@
       </p:pic>
       <p:pic>
         <p:nvPicPr>
-          <p:cNvPr id="188" name="Google Shape;188;g3bbeee67e43_0_53" title="Screenshot 2026-01-27 at 11.12.02 AM.png"/>
+          <p:cNvPr id="194" name="Google Shape;194;g3bbeee67e43_0_53" title="Screenshot 2026-01-27 at 11.12.02 AM.png"/>
           <p:cNvPicPr preferRelativeResize="0"/>
           <p:nvPr/>
         </p:nvPicPr>
@@ -12773,7 +13097,7 @@
       </p:pic>
       <p:pic>
         <p:nvPicPr>
-          <p:cNvPr id="189" name="Google Shape;189;g3bbeee67e43_0_53" title="Screenshot 2026-01-27 at 11.12.43 AM.png"/>
+          <p:cNvPr id="195" name="Google Shape;195;g3bbeee67e43_0_53" title="Screenshot 2026-01-27 at 11.12.43 AM.png"/>
           <p:cNvPicPr preferRelativeResize="0"/>
           <p:nvPr/>
         </p:nvPicPr>
@@ -12801,7 +13125,7 @@
       </p:pic>
       <p:pic>
         <p:nvPicPr>
-          <p:cNvPr id="190" name="Google Shape;190;g3bbeee67e43_0_53" title="Screenshot 2026-01-27 at 11.12.59 AM.png"/>
+          <p:cNvPr id="196" name="Google Shape;196;g3bbeee67e43_0_53" title="Screenshot 2026-01-27 at 11.12.59 AM.png"/>
           <p:cNvPicPr preferRelativeResize="0"/>
           <p:nvPr/>
         </p:nvPicPr>
@@ -12829,7 +13153,7 @@
       </p:pic>
       <p:sp>
         <p:nvSpPr>
-          <p:cNvPr id="191" name="Google Shape;191;g3bbeee67e43_0_53"/>
+          <p:cNvPr id="197" name="Google Shape;197;g3bbeee67e43_0_53"/>
           <p:cNvSpPr/>
           <p:nvPr/>
         </p:nvSpPr>
@@ -12876,7 +13200,7 @@
       </p:sp>
       <p:sp>
         <p:nvSpPr>
-          <p:cNvPr id="192" name="Google Shape;192;g3bbeee67e43_0_53"/>
+          <p:cNvPr id="198" name="Google Shape;198;g3bbeee67e43_0_53"/>
           <p:cNvSpPr/>
           <p:nvPr/>
         </p:nvSpPr>
@@ -12923,10 +13247,10 @@
       </p:sp>
       <p:cxnSp>
         <p:nvCxnSpPr>
-          <p:cNvPr id="193" name="Google Shape;193;g3bbeee67e43_0_53"/>
+          <p:cNvPr id="199" name="Google Shape;199;g3bbeee67e43_0_53"/>
           <p:cNvCxnSpPr>
-            <a:stCxn id="191" idx="3"/>
-            <a:endCxn id="192" idx="0"/>
+            <a:stCxn id="197" idx="3"/>
+            <a:endCxn id="198" idx="0"/>
           </p:cNvCxnSpPr>
           <p:nvPr/>
         </p:nvCxnSpPr>
@@ -12952,7 +13276,7 @@
       </p:cxnSp>
       <p:sp>
         <p:nvSpPr>
-          <p:cNvPr id="194" name="Google Shape;194;g3bbeee67e43_0_53"/>
+          <p:cNvPr id="200" name="Google Shape;200;g3bbeee67e43_0_53"/>
           <p:cNvSpPr/>
           <p:nvPr/>
         </p:nvSpPr>
@@ -12999,7 +13323,7 @@
       </p:sp>
       <p:sp>
         <p:nvSpPr>
-          <p:cNvPr id="195" name="Google Shape;195;g3bbeee67e43_0_53"/>
+          <p:cNvPr id="201" name="Google Shape;201;g3bbeee67e43_0_53"/>
           <p:cNvSpPr/>
           <p:nvPr/>
         </p:nvSpPr>
@@ -13046,7 +13370,7 @@
       </p:sp>
       <p:sp>
         <p:nvSpPr>
-          <p:cNvPr id="196" name="Google Shape;196;g3bbeee67e43_0_53"/>
+          <p:cNvPr id="202" name="Google Shape;202;g3bbeee67e43_0_53"/>
           <p:cNvSpPr/>
           <p:nvPr/>
         </p:nvSpPr>
@@ -13093,9 +13417,9 @@
       </p:sp>
       <p:cxnSp>
         <p:nvCxnSpPr>
-          <p:cNvPr id="197" name="Google Shape;197;g3bbeee67e43_0_53"/>
+          <p:cNvPr id="203" name="Google Shape;203;g3bbeee67e43_0_53"/>
           <p:cNvCxnSpPr>
-            <a:endCxn id="195" idx="2"/>
+            <a:endCxn id="201" idx="2"/>
           </p:cNvCxnSpPr>
           <p:nvPr/>
         </p:nvCxnSpPr>
@@ -13121,10 +13445,10 @@
       </p:cxnSp>
       <p:cxnSp>
         <p:nvCxnSpPr>
-          <p:cNvPr id="198" name="Google Shape;198;g3bbeee67e43_0_53"/>
+          <p:cNvPr id="204" name="Google Shape;204;g3bbeee67e43_0_53"/>
           <p:cNvCxnSpPr>
-            <a:stCxn id="194" idx="3"/>
-            <a:endCxn id="196" idx="2"/>
+            <a:stCxn id="200" idx="3"/>
+            <a:endCxn id="202" idx="2"/>
           </p:cNvCxnSpPr>
           <p:nvPr/>
         </p:nvCxnSpPr>
@@ -13150,7 +13474,7 @@
       </p:cxnSp>
       <p:sp>
         <p:nvSpPr>
-          <p:cNvPr id="199" name="Google Shape;199;g3bbeee67e43_0_53"/>
+          <p:cNvPr id="205" name="Google Shape;205;g3bbeee67e43_0_53"/>
           <p:cNvSpPr/>
           <p:nvPr/>
         </p:nvSpPr>
@@ -13197,7 +13521,7 @@
       </p:sp>
       <p:sp>
         <p:nvSpPr>
-          <p:cNvPr id="200" name="Google Shape;200;g3bbeee67e43_0_53"/>
+          <p:cNvPr id="206" name="Google Shape;206;g3bbeee67e43_0_53"/>
           <p:cNvSpPr/>
           <p:nvPr/>
         </p:nvSpPr>
@@ -13244,10 +13568,10 @@
       </p:sp>
       <p:cxnSp>
         <p:nvCxnSpPr>
-          <p:cNvPr id="201" name="Google Shape;201;g3bbeee67e43_0_53"/>
+          <p:cNvPr id="207" name="Google Shape;207;g3bbeee67e43_0_53"/>
           <p:cNvCxnSpPr>
-            <a:stCxn id="200" idx="0"/>
-            <a:endCxn id="199" idx="1"/>
+            <a:stCxn id="206" idx="0"/>
+            <a:endCxn id="205" idx="1"/>
           </p:cNvCxnSpPr>
           <p:nvPr/>
         </p:nvCxnSpPr>
@@ -13273,10 +13597,10 @@
       </p:cxnSp>
       <p:cxnSp>
         <p:nvCxnSpPr>
-          <p:cNvPr id="202" name="Google Shape;202;g3bbeee67e43_0_53"/>
+          <p:cNvPr id="208" name="Google Shape;208;g3bbeee67e43_0_53"/>
           <p:cNvCxnSpPr>
-            <a:stCxn id="192" idx="0"/>
-            <a:endCxn id="194" idx="1"/>
+            <a:stCxn id="198" idx="0"/>
+            <a:endCxn id="200" idx="1"/>
           </p:cNvCxnSpPr>
           <p:nvPr/>
         </p:nvCxnSpPr>
@@ -13313,7 +13637,7 @@
   <p:cSld>
     <p:spTree>
       <p:nvGrpSpPr>
-        <p:cNvPr id="206" name="Shape 206"/>
+        <p:cNvPr id="212" name="Shape 212"/>
         <p:cNvGrpSpPr/>
         <p:nvPr/>
       </p:nvGrpSpPr>
@@ -13327,7 +13651,7 @@
       </p:grpSpPr>
       <p:sp>
         <p:nvSpPr>
-          <p:cNvPr id="207" name="Google Shape;207;g3bbeee67e43_0_98"/>
+          <p:cNvPr id="213" name="Google Shape;213;g3bbeee67e43_0_98"/>
           <p:cNvSpPr txBox="1"/>
           <p:nvPr>
             <p:ph type="title"/>
@@ -13367,7 +13691,7 @@
       </p:sp>
       <p:sp>
         <p:nvSpPr>
-          <p:cNvPr id="208" name="Google Shape;208;g3bbeee67e43_0_98"/>
+          <p:cNvPr id="214" name="Google Shape;214;g3bbeee67e43_0_98"/>
           <p:cNvSpPr txBox="1"/>
           <p:nvPr>
             <p:ph idx="1" type="body"/>
@@ -13579,7 +13903,7 @@
   <p:cSld>
     <p:spTree>
       <p:nvGrpSpPr>
-        <p:cNvPr id="212" name="Shape 212"/>
+        <p:cNvPr id="218" name="Shape 218"/>
         <p:cNvGrpSpPr/>
         <p:nvPr/>
       </p:nvGrpSpPr>
@@ -13593,7 +13917,7 @@
       </p:grpSpPr>
       <p:sp>
         <p:nvSpPr>
-          <p:cNvPr id="213" name="Google Shape;213;g3bbeee67e43_0_137"/>
+          <p:cNvPr id="219" name="Google Shape;219;g3bbeee67e43_0_137"/>
           <p:cNvSpPr txBox="1"/>
           <p:nvPr>
             <p:ph type="title"/>
@@ -13669,7 +13993,7 @@
       </p:sp>
       <p:sp>
         <p:nvSpPr>
-          <p:cNvPr id="214" name="Google Shape;214;g3bbeee67e43_0_137"/>
+          <p:cNvPr id="220" name="Google Shape;220;g3bbeee67e43_0_137"/>
           <p:cNvSpPr txBox="1"/>
           <p:nvPr>
             <p:ph idx="1" type="body"/>
@@ -13842,7 +14166,7 @@
   <p:cSld>
     <p:spTree>
       <p:nvGrpSpPr>
-        <p:cNvPr id="218" name="Shape 218"/>
+        <p:cNvPr id="224" name="Shape 224"/>
         <p:cNvGrpSpPr/>
         <p:nvPr/>
       </p:nvGrpSpPr>
@@ -13856,7 +14180,7 @@
       </p:grpSpPr>
       <p:sp>
         <p:nvSpPr>
-          <p:cNvPr id="219" name="Google Shape;219;g3bbeee67e43_0_126"/>
+          <p:cNvPr id="225" name="Google Shape;225;g3bbeee67e43_0_126"/>
           <p:cNvSpPr txBox="1"/>
           <p:nvPr>
             <p:ph type="title"/>
@@ -13936,7 +14260,7 @@
       </p:sp>
       <p:sp>
         <p:nvSpPr>
-          <p:cNvPr id="220" name="Google Shape;220;g3bbeee67e43_0_126"/>
+          <p:cNvPr id="226" name="Google Shape;226;g3bbeee67e43_0_126"/>
           <p:cNvSpPr txBox="1"/>
           <p:nvPr>
             <p:ph idx="1" type="body"/>
@@ -14106,7 +14430,7 @@
   <p:cSld>
     <p:spTree>
       <p:nvGrpSpPr>
-        <p:cNvPr id="224" name="Shape 224"/>
+        <p:cNvPr id="230" name="Shape 230"/>
         <p:cNvGrpSpPr/>
         <p:nvPr/>
       </p:nvGrpSpPr>
@@ -14120,7 +14444,7 @@
       </p:grpSpPr>
       <p:sp>
         <p:nvSpPr>
-          <p:cNvPr id="225" name="Google Shape;225;g3bbeee67e43_0_132"/>
+          <p:cNvPr id="231" name="Google Shape;231;g3bbeee67e43_0_132"/>
           <p:cNvSpPr txBox="1"/>
           <p:nvPr>
             <p:ph type="title"/>
@@ -14196,7 +14520,7 @@
       </p:sp>
       <p:sp>
         <p:nvSpPr>
-          <p:cNvPr id="226" name="Google Shape;226;g3bbeee67e43_0_132"/>
+          <p:cNvPr id="232" name="Google Shape;232;g3bbeee67e43_0_132"/>
           <p:cNvSpPr txBox="1"/>
           <p:nvPr>
             <p:ph idx="1" type="body"/>
@@ -14341,7 +14665,7 @@
   <p:cSld>
     <p:spTree>
       <p:nvGrpSpPr>
-        <p:cNvPr id="230" name="Shape 230"/>
+        <p:cNvPr id="236" name="Shape 236"/>
         <p:cNvGrpSpPr/>
         <p:nvPr/>
       </p:nvGrpSpPr>
@@ -14355,7 +14679,7 @@
       </p:grpSpPr>
       <p:sp>
         <p:nvSpPr>
-          <p:cNvPr id="231" name="Google Shape;231;g3bbeee67e43_0_147"/>
+          <p:cNvPr id="237" name="Google Shape;237;g3bbeee67e43_0_147"/>
           <p:cNvSpPr txBox="1"/>
           <p:nvPr>
             <p:ph type="title"/>
@@ -14439,7 +14763,7 @@
       </p:sp>
       <p:sp>
         <p:nvSpPr>
-          <p:cNvPr id="232" name="Google Shape;232;g3bbeee67e43_0_147"/>
+          <p:cNvPr id="238" name="Google Shape;238;g3bbeee67e43_0_147"/>
           <p:cNvSpPr txBox="1"/>
           <p:nvPr>
             <p:ph idx="1" type="body"/>
@@ -14733,7 +15057,7 @@
   <p:cSld>
     <p:spTree>
       <p:nvGrpSpPr>
-        <p:cNvPr id="236" name="Shape 236"/>
+        <p:cNvPr id="242" name="Shape 242"/>
         <p:cNvGrpSpPr/>
         <p:nvPr/>
       </p:nvGrpSpPr>
@@ -14747,7 +15071,7 @@
       </p:grpSpPr>
       <p:sp>
         <p:nvSpPr>
-          <p:cNvPr id="237" name="Google Shape;237;g3bbeee67e43_0_142"/>
+          <p:cNvPr id="243" name="Google Shape;243;g3bbeee67e43_0_142"/>
           <p:cNvSpPr txBox="1"/>
           <p:nvPr>
             <p:ph type="title"/>
@@ -14831,7 +15155,7 @@
       </p:sp>
       <p:sp>
         <p:nvSpPr>
-          <p:cNvPr id="238" name="Google Shape;238;g3bbeee67e43_0_142"/>
+          <p:cNvPr id="244" name="Google Shape;244;g3bbeee67e43_0_142"/>
           <p:cNvSpPr txBox="1"/>
           <p:nvPr>
             <p:ph idx="1" type="body"/>
@@ -14981,7 +15305,7 @@
   <p:cSld>
     <p:spTree>
       <p:nvGrpSpPr>
-        <p:cNvPr id="242" name="Shape 242"/>
+        <p:cNvPr id="248" name="Shape 248"/>
         <p:cNvGrpSpPr/>
         <p:nvPr/>
       </p:nvGrpSpPr>
@@ -14995,7 +15319,7 @@
       </p:grpSpPr>
       <p:sp>
         <p:nvSpPr>
-          <p:cNvPr id="243" name="Google Shape;243;g3bbeee67e43_0_93"/>
+          <p:cNvPr id="249" name="Google Shape;249;g3bbeee67e43_0_93"/>
           <p:cNvSpPr txBox="1"/>
           <p:nvPr>
             <p:ph type="title"/>
@@ -15035,7 +15359,7 @@
       </p:sp>
       <p:sp>
         <p:nvSpPr>
-          <p:cNvPr id="244" name="Google Shape;244;g3bbeee67e43_0_93"/>
+          <p:cNvPr id="250" name="Google Shape;250;g3bbeee67e43_0_93"/>
           <p:cNvSpPr txBox="1"/>
           <p:nvPr>
             <p:ph idx="1" type="body"/>

--- a/Blank/Lecture_05_ Tokenization_03.pptx
+++ b/Blank/Lecture_05_ Tokenization_03.pptx
@@ -25,14 +25,6 @@
     <p:sldId id="270" r:id="rId19"/>
     <p:sldId id="271" r:id="rId20"/>
     <p:sldId id="272" r:id="rId21"/>
-    <p:sldId id="273" r:id="rId22"/>
-    <p:sldId id="274" r:id="rId23"/>
-    <p:sldId id="275" r:id="rId24"/>
-    <p:sldId id="276" r:id="rId25"/>
-    <p:sldId id="277" r:id="rId26"/>
-    <p:sldId id="278" r:id="rId27"/>
-    <p:sldId id="279" r:id="rId28"/>
-    <p:sldId id="280" r:id="rId29"/>
   </p:sldIdLst>
   <p:sldSz cy="6858000" cx="9144000"/>
   <p:notesSz cx="6858000" cy="9144000"/>
@@ -267,7 +259,7 @@
   </p:defaultTextStyle>
   <p:extLst>
     <p:ext uri="GoogleSlidesCustomDataVersion2">
-      <go:slidesCustomData xmlns:go="http://customooxmlschemas.google.com/" r:id="rId30" roundtripDataSignature="AMtx7mjBcaVylMX+7tKAflK6s1IQ3s5NzQ=="/>
+      <go:slidesCustomData xmlns:go="http://customooxmlschemas.google.com/" r:id="rId22" roundtripDataSignature="AMtx7mjCkZ5rI5xbNBF+wKS+0hYPTtnFVw=="/>
     </p:ext>
   </p:extLst>
 </p:presentation>
@@ -1654,124 +1646,7 @@
       </p:grpSpPr>
       <p:sp>
         <p:nvSpPr>
-          <p:cNvPr id="175" name="Google Shape;175;g3bbeee67e43_0_26:notes"/>
-          <p:cNvSpPr/>
-          <p:nvPr>
-            <p:ph idx="2" type="sldImg"/>
-          </p:nvPr>
-        </p:nvSpPr>
-        <p:spPr>
-          <a:xfrm>
-            <a:off x="1143309" y="685800"/>
-            <a:ext cx="4572000" cy="3429000"/>
-          </a:xfrm>
-          <a:custGeom>
-            <a:rect b="b" l="l" r="r" t="t"/>
-            <a:pathLst>
-              <a:path extrusionOk="0" h="120000" w="120000">
-                <a:moveTo>
-                  <a:pt x="0" y="0"/>
-                </a:moveTo>
-                <a:lnTo>
-                  <a:pt x="120000" y="0"/>
-                </a:lnTo>
-                <a:lnTo>
-                  <a:pt x="120000" y="120000"/>
-                </a:lnTo>
-                <a:lnTo>
-                  <a:pt x="0" y="120000"/>
-                </a:lnTo>
-                <a:close/>
-              </a:path>
-            </a:pathLst>
-          </a:custGeom>
-          <a:noFill/>
-          <a:ln cap="flat" cmpd="sng" w="9525">
-            <a:solidFill>
-              <a:srgbClr val="000000"/>
-            </a:solidFill>
-            <a:prstDash val="solid"/>
-            <a:round/>
-            <a:headEnd len="sm" w="sm" type="none"/>
-            <a:tailEnd len="sm" w="sm" type="none"/>
-          </a:ln>
-        </p:spPr>
-      </p:sp>
-      <p:sp>
-        <p:nvSpPr>
-          <p:cNvPr id="176" name="Google Shape;176;g3bbeee67e43_0_26:notes"/>
-          <p:cNvSpPr txBox="1"/>
-          <p:nvPr>
-            <p:ph idx="1" type="body"/>
-          </p:nvPr>
-        </p:nvSpPr>
-        <p:spPr>
-          <a:xfrm>
-            <a:off x="685800" y="4343400"/>
-            <a:ext cx="5486400" cy="4114800"/>
-          </a:xfrm>
-          <a:prstGeom prst="rect">
-            <a:avLst/>
-          </a:prstGeom>
-          <a:noFill/>
-          <a:ln>
-            <a:noFill/>
-          </a:ln>
-        </p:spPr>
-        <p:txBody>
-          <a:bodyPr anchorCtr="0" anchor="t" bIns="91425" lIns="91425" spcFirstLastPara="1" rIns="91425" wrap="square" tIns="91425">
-            <a:noAutofit/>
-          </a:bodyPr>
-          <a:lstStyle/>
-          <a:p>
-            <a:pPr indent="0" lvl="0" marL="0" rtl="0" algn="l">
-              <a:lnSpc>
-                <a:spcPct val="100000"/>
-              </a:lnSpc>
-              <a:spcBef>
-                <a:spcPts val="0"/>
-              </a:spcBef>
-              <a:spcAft>
-                <a:spcPts val="0"/>
-              </a:spcAft>
-              <a:buSzPts val="1400"/>
-              <a:buNone/>
-            </a:pPr>
-            <a:r>
-              <a:t/>
-            </a:r>
-            <a:endParaRPr/>
-          </a:p>
-        </p:txBody>
-      </p:sp>
-    </p:spTree>
-  </p:cSld>
-  <p:clrMapOvr>
-    <a:masterClrMapping/>
-  </p:clrMapOvr>
-</p:notes>
-</file>
-
-<file path=ppt/notesSlides/notesSlide17.xml><?xml version="1.0" encoding="utf-8"?>
-<p:notes xmlns:a="http://schemas.openxmlformats.org/drawingml/2006/main" xmlns:r="http://schemas.openxmlformats.org/officeDocument/2006/relationships" xmlns:mc="http://schemas.openxmlformats.org/markup-compatibility/2006" xmlns:mv="urn:schemas-microsoft-com:mac:vml" xmlns:p="http://schemas.openxmlformats.org/presentationml/2006/main" xmlns:c="http://schemas.openxmlformats.org/drawingml/2006/chart" xmlns:dgm="http://schemas.openxmlformats.org/drawingml/2006/diagram" xmlns:o="urn:schemas-microsoft-com:office:office" xmlns:v="urn:schemas-microsoft-com:vml" xmlns:pvml="urn:schemas-microsoft-com:office:powerpoint" xmlns:com="http://schemas.openxmlformats.org/drawingml/2006/compatibility" xmlns:p14="http://schemas.microsoft.com/office/powerpoint/2010/main" xmlns:p15="http://schemas.microsoft.com/office/powerpoint/2012/main" xmlns:ahyp="http://schemas.microsoft.com/office/drawing/2018/hyperlinkcolor" showMasterPhAnim="0" showMasterSp="0">
-  <p:cSld>
-    <p:spTree>
-      <p:nvGrpSpPr>
-        <p:cNvPr id="179" name="Shape 179"/>
-        <p:cNvGrpSpPr/>
-        <p:nvPr/>
-      </p:nvGrpSpPr>
-      <p:grpSpPr>
-        <a:xfrm>
-          <a:off x="0" y="0"/>
-          <a:ext cx="0" cy="0"/>
-          <a:chOff x="0" y="0"/>
-          <a:chExt cx="0" cy="0"/>
-        </a:xfrm>
-      </p:grpSpPr>
-      <p:sp>
-        <p:nvSpPr>
-          <p:cNvPr id="180" name="Google Shape;180;g3bbeee67e43_0_44:notes"/>
+          <p:cNvPr id="175" name="Google Shape;175;g3bbeee67e43_0_44:notes"/>
           <p:cNvSpPr/>
           <p:nvPr>
             <p:ph idx="2" type="sldImg"/>
@@ -1806,7 +1681,7 @@
       </p:sp>
       <p:sp>
         <p:nvSpPr>
-          <p:cNvPr id="181" name="Google Shape;181;g3bbeee67e43_0_44:notes"/>
+          <p:cNvPr id="176" name="Google Shape;176;g3bbeee67e43_0_44:notes"/>
           <p:cNvSpPr txBox="1"/>
           <p:nvPr>
             <p:ph idx="1" type="body"/>
@@ -1851,12 +1726,12 @@
 </p:notes>
 </file>
 
-<file path=ppt/notesSlides/notesSlide18.xml><?xml version="1.0" encoding="utf-8"?>
+<file path=ppt/notesSlides/notesSlide17.xml><?xml version="1.0" encoding="utf-8"?>
 <p:notes xmlns:a="http://schemas.openxmlformats.org/drawingml/2006/main" xmlns:r="http://schemas.openxmlformats.org/officeDocument/2006/relationships" xmlns:mc="http://schemas.openxmlformats.org/markup-compatibility/2006" xmlns:mv="urn:schemas-microsoft-com:mac:vml" xmlns:p="http://schemas.openxmlformats.org/presentationml/2006/main" xmlns:c="http://schemas.openxmlformats.org/drawingml/2006/chart" xmlns:dgm="http://schemas.openxmlformats.org/drawingml/2006/diagram" xmlns:o="urn:schemas-microsoft-com:office:office" xmlns:v="urn:schemas-microsoft-com:vml" xmlns:pvml="urn:schemas-microsoft-com:office:powerpoint" xmlns:com="http://schemas.openxmlformats.org/drawingml/2006/compatibility" xmlns:p14="http://schemas.microsoft.com/office/powerpoint/2010/main" xmlns:p15="http://schemas.microsoft.com/office/powerpoint/2012/main" xmlns:ahyp="http://schemas.microsoft.com/office/drawing/2018/hyperlinkcolor" showMasterPhAnim="0" showMasterSp="0">
   <p:cSld>
     <p:spTree>
       <p:nvGrpSpPr>
-        <p:cNvPr id="187" name="Shape 187"/>
+        <p:cNvPr id="182" name="Shape 182"/>
         <p:cNvGrpSpPr/>
         <p:nvPr/>
       </p:nvGrpSpPr>
@@ -1870,7 +1745,7 @@
       </p:grpSpPr>
       <p:sp>
         <p:nvSpPr>
-          <p:cNvPr id="188" name="Google Shape;188;g3bbeee67e43_0_53:notes"/>
+          <p:cNvPr id="183" name="Google Shape;183;g3bbeee67e43_0_53:notes"/>
           <p:cNvSpPr/>
           <p:nvPr>
             <p:ph idx="2" type="sldImg"/>
@@ -1905,106 +1780,7 @@
       </p:sp>
       <p:sp>
         <p:nvSpPr>
-          <p:cNvPr id="189" name="Google Shape;189;g3bbeee67e43_0_53:notes"/>
-          <p:cNvSpPr txBox="1"/>
-          <p:nvPr>
-            <p:ph idx="1" type="body"/>
-          </p:nvPr>
-        </p:nvSpPr>
-        <p:spPr>
-          <a:xfrm>
-            <a:off x="685800" y="4343400"/>
-            <a:ext cx="5486400" cy="4114800"/>
-          </a:xfrm>
-          <a:prstGeom prst="rect">
-            <a:avLst/>
-          </a:prstGeom>
-        </p:spPr>
-        <p:txBody>
-          <a:bodyPr anchorCtr="0" anchor="t" bIns="91425" lIns="91425" spcFirstLastPara="1" rIns="91425" wrap="square" tIns="91425">
-            <a:noAutofit/>
-          </a:bodyPr>
-          <a:lstStyle/>
-          <a:p>
-            <a:pPr indent="0" lvl="0" marL="0" rtl="0" algn="l">
-              <a:spcBef>
-                <a:spcPts val="0"/>
-              </a:spcBef>
-              <a:spcAft>
-                <a:spcPts val="0"/>
-              </a:spcAft>
-              <a:buNone/>
-            </a:pPr>
-            <a:r>
-              <a:t/>
-            </a:r>
-            <a:endParaRPr/>
-          </a:p>
-        </p:txBody>
-      </p:sp>
-    </p:spTree>
-  </p:cSld>
-  <p:clrMapOvr>
-    <a:masterClrMapping/>
-  </p:clrMapOvr>
-</p:notes>
-</file>
-
-<file path=ppt/notesSlides/notesSlide19.xml><?xml version="1.0" encoding="utf-8"?>
-<p:notes xmlns:a="http://schemas.openxmlformats.org/drawingml/2006/main" xmlns:r="http://schemas.openxmlformats.org/officeDocument/2006/relationships" xmlns:mc="http://schemas.openxmlformats.org/markup-compatibility/2006" xmlns:mv="urn:schemas-microsoft-com:mac:vml" xmlns:p="http://schemas.openxmlformats.org/presentationml/2006/main" xmlns:c="http://schemas.openxmlformats.org/drawingml/2006/chart" xmlns:dgm="http://schemas.openxmlformats.org/drawingml/2006/diagram" xmlns:o="urn:schemas-microsoft-com:office:office" xmlns:v="urn:schemas-microsoft-com:vml" xmlns:pvml="urn:schemas-microsoft-com:office:powerpoint" xmlns:com="http://schemas.openxmlformats.org/drawingml/2006/compatibility" xmlns:p14="http://schemas.microsoft.com/office/powerpoint/2010/main" xmlns:p15="http://schemas.microsoft.com/office/powerpoint/2012/main" xmlns:ahyp="http://schemas.microsoft.com/office/drawing/2018/hyperlinkcolor" showMasterPhAnim="0" showMasterSp="0">
-  <p:cSld>
-    <p:spTree>
-      <p:nvGrpSpPr>
-        <p:cNvPr id="209" name="Shape 209"/>
-        <p:cNvGrpSpPr/>
-        <p:nvPr/>
-      </p:nvGrpSpPr>
-      <p:grpSpPr>
-        <a:xfrm>
-          <a:off x="0" y="0"/>
-          <a:ext cx="0" cy="0"/>
-          <a:chOff x="0" y="0"/>
-          <a:chExt cx="0" cy="0"/>
-        </a:xfrm>
-      </p:grpSpPr>
-      <p:sp>
-        <p:nvSpPr>
-          <p:cNvPr id="210" name="Google Shape;210;g3bbeee67e43_0_98:notes"/>
-          <p:cNvSpPr/>
-          <p:nvPr>
-            <p:ph idx="2" type="sldImg"/>
-          </p:nvPr>
-        </p:nvSpPr>
-        <p:spPr>
-          <a:xfrm>
-            <a:off x="1143309" y="685800"/>
-            <a:ext cx="4572000" cy="3429000"/>
-          </a:xfrm>
-          <a:custGeom>
-            <a:rect b="b" l="l" r="r" t="t"/>
-            <a:pathLst>
-              <a:path extrusionOk="0" h="120000" w="120000">
-                <a:moveTo>
-                  <a:pt x="0" y="0"/>
-                </a:moveTo>
-                <a:lnTo>
-                  <a:pt x="120000" y="0"/>
-                </a:lnTo>
-                <a:lnTo>
-                  <a:pt x="120000" y="120000"/>
-                </a:lnTo>
-                <a:lnTo>
-                  <a:pt x="0" y="120000"/>
-                </a:lnTo>
-                <a:close/>
-              </a:path>
-            </a:pathLst>
-          </a:custGeom>
-        </p:spPr>
-      </p:sp>
-      <p:sp>
-        <p:nvSpPr>
-          <p:cNvPr id="211" name="Google Shape;211;g3bbeee67e43_0_98:notes"/>
+          <p:cNvPr id="184" name="Google Shape;184;g3bbeee67e43_0_53:notes"/>
           <p:cNvSpPr txBox="1"/>
           <p:nvPr>
             <p:ph idx="1" type="body"/>
@@ -2149,690 +1925,6 @@
                 <a:spcPts val="0"/>
               </a:spcAft>
               <a:buSzPts val="1400"/>
-              <a:buNone/>
-            </a:pPr>
-            <a:r>
-              <a:t/>
-            </a:r>
-            <a:endParaRPr/>
-          </a:p>
-        </p:txBody>
-      </p:sp>
-    </p:spTree>
-  </p:cSld>
-  <p:clrMapOvr>
-    <a:masterClrMapping/>
-  </p:clrMapOvr>
-</p:notes>
-</file>
-
-<file path=ppt/notesSlides/notesSlide20.xml><?xml version="1.0" encoding="utf-8"?>
-<p:notes xmlns:a="http://schemas.openxmlformats.org/drawingml/2006/main" xmlns:r="http://schemas.openxmlformats.org/officeDocument/2006/relationships" xmlns:mc="http://schemas.openxmlformats.org/markup-compatibility/2006" xmlns:mv="urn:schemas-microsoft-com:mac:vml" xmlns:p="http://schemas.openxmlformats.org/presentationml/2006/main" xmlns:c="http://schemas.openxmlformats.org/drawingml/2006/chart" xmlns:dgm="http://schemas.openxmlformats.org/drawingml/2006/diagram" xmlns:o="urn:schemas-microsoft-com:office:office" xmlns:v="urn:schemas-microsoft-com:vml" xmlns:pvml="urn:schemas-microsoft-com:office:powerpoint" xmlns:com="http://schemas.openxmlformats.org/drawingml/2006/compatibility" xmlns:p14="http://schemas.microsoft.com/office/powerpoint/2010/main" xmlns:p15="http://schemas.microsoft.com/office/powerpoint/2012/main" xmlns:ahyp="http://schemas.microsoft.com/office/drawing/2018/hyperlinkcolor" showMasterPhAnim="0" showMasterSp="0">
-  <p:cSld>
-    <p:spTree>
-      <p:nvGrpSpPr>
-        <p:cNvPr id="215" name="Shape 215"/>
-        <p:cNvGrpSpPr/>
-        <p:nvPr/>
-      </p:nvGrpSpPr>
-      <p:grpSpPr>
-        <a:xfrm>
-          <a:off x="0" y="0"/>
-          <a:ext cx="0" cy="0"/>
-          <a:chOff x="0" y="0"/>
-          <a:chExt cx="0" cy="0"/>
-        </a:xfrm>
-      </p:grpSpPr>
-      <p:sp>
-        <p:nvSpPr>
-          <p:cNvPr id="216" name="Google Shape;216;g3bbeee67e43_0_137:notes"/>
-          <p:cNvSpPr/>
-          <p:nvPr>
-            <p:ph idx="2" type="sldImg"/>
-          </p:nvPr>
-        </p:nvSpPr>
-        <p:spPr>
-          <a:xfrm>
-            <a:off x="1143309" y="685800"/>
-            <a:ext cx="4572000" cy="3429000"/>
-          </a:xfrm>
-          <a:custGeom>
-            <a:rect b="b" l="l" r="r" t="t"/>
-            <a:pathLst>
-              <a:path extrusionOk="0" h="120000" w="120000">
-                <a:moveTo>
-                  <a:pt x="0" y="0"/>
-                </a:moveTo>
-                <a:lnTo>
-                  <a:pt x="120000" y="0"/>
-                </a:lnTo>
-                <a:lnTo>
-                  <a:pt x="120000" y="120000"/>
-                </a:lnTo>
-                <a:lnTo>
-                  <a:pt x="0" y="120000"/>
-                </a:lnTo>
-                <a:close/>
-              </a:path>
-            </a:pathLst>
-          </a:custGeom>
-          <a:noFill/>
-          <a:ln cap="flat" cmpd="sng" w="9525">
-            <a:solidFill>
-              <a:srgbClr val="000000"/>
-            </a:solidFill>
-            <a:prstDash val="solid"/>
-            <a:round/>
-            <a:headEnd len="sm" w="sm" type="none"/>
-            <a:tailEnd len="sm" w="sm" type="none"/>
-          </a:ln>
-        </p:spPr>
-      </p:sp>
-      <p:sp>
-        <p:nvSpPr>
-          <p:cNvPr id="217" name="Google Shape;217;g3bbeee67e43_0_137:notes"/>
-          <p:cNvSpPr txBox="1"/>
-          <p:nvPr>
-            <p:ph idx="1" type="body"/>
-          </p:nvPr>
-        </p:nvSpPr>
-        <p:spPr>
-          <a:xfrm>
-            <a:off x="685800" y="4343400"/>
-            <a:ext cx="5486400" cy="4114800"/>
-          </a:xfrm>
-          <a:prstGeom prst="rect">
-            <a:avLst/>
-          </a:prstGeom>
-          <a:noFill/>
-          <a:ln>
-            <a:noFill/>
-          </a:ln>
-        </p:spPr>
-        <p:txBody>
-          <a:bodyPr anchorCtr="0" anchor="t" bIns="91425" lIns="91425" spcFirstLastPara="1" rIns="91425" wrap="square" tIns="91425">
-            <a:noAutofit/>
-          </a:bodyPr>
-          <a:lstStyle/>
-          <a:p>
-            <a:pPr indent="0" lvl="0" marL="0" rtl="0" algn="l">
-              <a:lnSpc>
-                <a:spcPct val="100000"/>
-              </a:lnSpc>
-              <a:spcBef>
-                <a:spcPts val="0"/>
-              </a:spcBef>
-              <a:spcAft>
-                <a:spcPts val="0"/>
-              </a:spcAft>
-              <a:buSzPts val="1400"/>
-              <a:buNone/>
-            </a:pPr>
-            <a:r>
-              <a:t/>
-            </a:r>
-            <a:endParaRPr/>
-          </a:p>
-        </p:txBody>
-      </p:sp>
-    </p:spTree>
-  </p:cSld>
-  <p:clrMapOvr>
-    <a:masterClrMapping/>
-  </p:clrMapOvr>
-</p:notes>
-</file>
-
-<file path=ppt/notesSlides/notesSlide21.xml><?xml version="1.0" encoding="utf-8"?>
-<p:notes xmlns:a="http://schemas.openxmlformats.org/drawingml/2006/main" xmlns:r="http://schemas.openxmlformats.org/officeDocument/2006/relationships" xmlns:mc="http://schemas.openxmlformats.org/markup-compatibility/2006" xmlns:mv="urn:schemas-microsoft-com:mac:vml" xmlns:p="http://schemas.openxmlformats.org/presentationml/2006/main" xmlns:c="http://schemas.openxmlformats.org/drawingml/2006/chart" xmlns:dgm="http://schemas.openxmlformats.org/drawingml/2006/diagram" xmlns:o="urn:schemas-microsoft-com:office:office" xmlns:v="urn:schemas-microsoft-com:vml" xmlns:pvml="urn:schemas-microsoft-com:office:powerpoint" xmlns:com="http://schemas.openxmlformats.org/drawingml/2006/compatibility" xmlns:p14="http://schemas.microsoft.com/office/powerpoint/2010/main" xmlns:p15="http://schemas.microsoft.com/office/powerpoint/2012/main" xmlns:ahyp="http://schemas.microsoft.com/office/drawing/2018/hyperlinkcolor" showMasterPhAnim="0" showMasterSp="0">
-  <p:cSld>
-    <p:spTree>
-      <p:nvGrpSpPr>
-        <p:cNvPr id="221" name="Shape 221"/>
-        <p:cNvGrpSpPr/>
-        <p:nvPr/>
-      </p:nvGrpSpPr>
-      <p:grpSpPr>
-        <a:xfrm>
-          <a:off x="0" y="0"/>
-          <a:ext cx="0" cy="0"/>
-          <a:chOff x="0" y="0"/>
-          <a:chExt cx="0" cy="0"/>
-        </a:xfrm>
-      </p:grpSpPr>
-      <p:sp>
-        <p:nvSpPr>
-          <p:cNvPr id="222" name="Google Shape;222;g3bbeee67e43_0_126:notes"/>
-          <p:cNvSpPr/>
-          <p:nvPr>
-            <p:ph idx="2" type="sldImg"/>
-          </p:nvPr>
-        </p:nvSpPr>
-        <p:spPr>
-          <a:xfrm>
-            <a:off x="1143309" y="685800"/>
-            <a:ext cx="4572000" cy="3429000"/>
-          </a:xfrm>
-          <a:custGeom>
-            <a:rect b="b" l="l" r="r" t="t"/>
-            <a:pathLst>
-              <a:path extrusionOk="0" h="120000" w="120000">
-                <a:moveTo>
-                  <a:pt x="0" y="0"/>
-                </a:moveTo>
-                <a:lnTo>
-                  <a:pt x="120000" y="0"/>
-                </a:lnTo>
-                <a:lnTo>
-                  <a:pt x="120000" y="120000"/>
-                </a:lnTo>
-                <a:lnTo>
-                  <a:pt x="0" y="120000"/>
-                </a:lnTo>
-                <a:close/>
-              </a:path>
-            </a:pathLst>
-          </a:custGeom>
-          <a:noFill/>
-          <a:ln cap="flat" cmpd="sng" w="9525">
-            <a:solidFill>
-              <a:srgbClr val="000000"/>
-            </a:solidFill>
-            <a:prstDash val="solid"/>
-            <a:round/>
-            <a:headEnd len="sm" w="sm" type="none"/>
-            <a:tailEnd len="sm" w="sm" type="none"/>
-          </a:ln>
-        </p:spPr>
-      </p:sp>
-      <p:sp>
-        <p:nvSpPr>
-          <p:cNvPr id="223" name="Google Shape;223;g3bbeee67e43_0_126:notes"/>
-          <p:cNvSpPr txBox="1"/>
-          <p:nvPr>
-            <p:ph idx="1" type="body"/>
-          </p:nvPr>
-        </p:nvSpPr>
-        <p:spPr>
-          <a:xfrm>
-            <a:off x="685800" y="4343400"/>
-            <a:ext cx="5486400" cy="4114800"/>
-          </a:xfrm>
-          <a:prstGeom prst="rect">
-            <a:avLst/>
-          </a:prstGeom>
-          <a:noFill/>
-          <a:ln>
-            <a:noFill/>
-          </a:ln>
-        </p:spPr>
-        <p:txBody>
-          <a:bodyPr anchorCtr="0" anchor="t" bIns="91425" lIns="91425" spcFirstLastPara="1" rIns="91425" wrap="square" tIns="91425">
-            <a:noAutofit/>
-          </a:bodyPr>
-          <a:lstStyle/>
-          <a:p>
-            <a:pPr indent="0" lvl="0" marL="0" rtl="0" algn="l">
-              <a:lnSpc>
-                <a:spcPct val="100000"/>
-              </a:lnSpc>
-              <a:spcBef>
-                <a:spcPts val="0"/>
-              </a:spcBef>
-              <a:spcAft>
-                <a:spcPts val="0"/>
-              </a:spcAft>
-              <a:buSzPts val="1400"/>
-              <a:buNone/>
-            </a:pPr>
-            <a:r>
-              <a:t/>
-            </a:r>
-            <a:endParaRPr/>
-          </a:p>
-        </p:txBody>
-      </p:sp>
-    </p:spTree>
-  </p:cSld>
-  <p:clrMapOvr>
-    <a:masterClrMapping/>
-  </p:clrMapOvr>
-</p:notes>
-</file>
-
-<file path=ppt/notesSlides/notesSlide22.xml><?xml version="1.0" encoding="utf-8"?>
-<p:notes xmlns:a="http://schemas.openxmlformats.org/drawingml/2006/main" xmlns:r="http://schemas.openxmlformats.org/officeDocument/2006/relationships" xmlns:mc="http://schemas.openxmlformats.org/markup-compatibility/2006" xmlns:mv="urn:schemas-microsoft-com:mac:vml" xmlns:p="http://schemas.openxmlformats.org/presentationml/2006/main" xmlns:c="http://schemas.openxmlformats.org/drawingml/2006/chart" xmlns:dgm="http://schemas.openxmlformats.org/drawingml/2006/diagram" xmlns:o="urn:schemas-microsoft-com:office:office" xmlns:v="urn:schemas-microsoft-com:vml" xmlns:pvml="urn:schemas-microsoft-com:office:powerpoint" xmlns:com="http://schemas.openxmlformats.org/drawingml/2006/compatibility" xmlns:p14="http://schemas.microsoft.com/office/powerpoint/2010/main" xmlns:p15="http://schemas.microsoft.com/office/powerpoint/2012/main" xmlns:ahyp="http://schemas.microsoft.com/office/drawing/2018/hyperlinkcolor" showMasterPhAnim="0" showMasterSp="0">
-  <p:cSld>
-    <p:spTree>
-      <p:nvGrpSpPr>
-        <p:cNvPr id="227" name="Shape 227"/>
-        <p:cNvGrpSpPr/>
-        <p:nvPr/>
-      </p:nvGrpSpPr>
-      <p:grpSpPr>
-        <a:xfrm>
-          <a:off x="0" y="0"/>
-          <a:ext cx="0" cy="0"/>
-          <a:chOff x="0" y="0"/>
-          <a:chExt cx="0" cy="0"/>
-        </a:xfrm>
-      </p:grpSpPr>
-      <p:sp>
-        <p:nvSpPr>
-          <p:cNvPr id="228" name="Google Shape;228;g3bbeee67e43_0_132:notes"/>
-          <p:cNvSpPr/>
-          <p:nvPr>
-            <p:ph idx="2" type="sldImg"/>
-          </p:nvPr>
-        </p:nvSpPr>
-        <p:spPr>
-          <a:xfrm>
-            <a:off x="1143309" y="685800"/>
-            <a:ext cx="4572000" cy="3429000"/>
-          </a:xfrm>
-          <a:custGeom>
-            <a:rect b="b" l="l" r="r" t="t"/>
-            <a:pathLst>
-              <a:path extrusionOk="0" h="120000" w="120000">
-                <a:moveTo>
-                  <a:pt x="0" y="0"/>
-                </a:moveTo>
-                <a:lnTo>
-                  <a:pt x="120000" y="0"/>
-                </a:lnTo>
-                <a:lnTo>
-                  <a:pt x="120000" y="120000"/>
-                </a:lnTo>
-                <a:lnTo>
-                  <a:pt x="0" y="120000"/>
-                </a:lnTo>
-                <a:close/>
-              </a:path>
-            </a:pathLst>
-          </a:custGeom>
-          <a:noFill/>
-          <a:ln cap="flat" cmpd="sng" w="9525">
-            <a:solidFill>
-              <a:srgbClr val="000000"/>
-            </a:solidFill>
-            <a:prstDash val="solid"/>
-            <a:round/>
-            <a:headEnd len="sm" w="sm" type="none"/>
-            <a:tailEnd len="sm" w="sm" type="none"/>
-          </a:ln>
-        </p:spPr>
-      </p:sp>
-      <p:sp>
-        <p:nvSpPr>
-          <p:cNvPr id="229" name="Google Shape;229;g3bbeee67e43_0_132:notes"/>
-          <p:cNvSpPr txBox="1"/>
-          <p:nvPr>
-            <p:ph idx="1" type="body"/>
-          </p:nvPr>
-        </p:nvSpPr>
-        <p:spPr>
-          <a:xfrm>
-            <a:off x="685800" y="4343400"/>
-            <a:ext cx="5486400" cy="4114800"/>
-          </a:xfrm>
-          <a:prstGeom prst="rect">
-            <a:avLst/>
-          </a:prstGeom>
-          <a:noFill/>
-          <a:ln>
-            <a:noFill/>
-          </a:ln>
-        </p:spPr>
-        <p:txBody>
-          <a:bodyPr anchorCtr="0" anchor="t" bIns="91425" lIns="91425" spcFirstLastPara="1" rIns="91425" wrap="square" tIns="91425">
-            <a:noAutofit/>
-          </a:bodyPr>
-          <a:lstStyle/>
-          <a:p>
-            <a:pPr indent="0" lvl="0" marL="0" rtl="0" algn="l">
-              <a:lnSpc>
-                <a:spcPct val="100000"/>
-              </a:lnSpc>
-              <a:spcBef>
-                <a:spcPts val="0"/>
-              </a:spcBef>
-              <a:spcAft>
-                <a:spcPts val="0"/>
-              </a:spcAft>
-              <a:buSzPts val="1400"/>
-              <a:buNone/>
-            </a:pPr>
-            <a:r>
-              <a:t/>
-            </a:r>
-            <a:endParaRPr/>
-          </a:p>
-        </p:txBody>
-      </p:sp>
-    </p:spTree>
-  </p:cSld>
-  <p:clrMapOvr>
-    <a:masterClrMapping/>
-  </p:clrMapOvr>
-</p:notes>
-</file>
-
-<file path=ppt/notesSlides/notesSlide23.xml><?xml version="1.0" encoding="utf-8"?>
-<p:notes xmlns:a="http://schemas.openxmlformats.org/drawingml/2006/main" xmlns:r="http://schemas.openxmlformats.org/officeDocument/2006/relationships" xmlns:mc="http://schemas.openxmlformats.org/markup-compatibility/2006" xmlns:mv="urn:schemas-microsoft-com:mac:vml" xmlns:p="http://schemas.openxmlformats.org/presentationml/2006/main" xmlns:c="http://schemas.openxmlformats.org/drawingml/2006/chart" xmlns:dgm="http://schemas.openxmlformats.org/drawingml/2006/diagram" xmlns:o="urn:schemas-microsoft-com:office:office" xmlns:v="urn:schemas-microsoft-com:vml" xmlns:pvml="urn:schemas-microsoft-com:office:powerpoint" xmlns:com="http://schemas.openxmlformats.org/drawingml/2006/compatibility" xmlns:p14="http://schemas.microsoft.com/office/powerpoint/2010/main" xmlns:p15="http://schemas.microsoft.com/office/powerpoint/2012/main" xmlns:ahyp="http://schemas.microsoft.com/office/drawing/2018/hyperlinkcolor" showMasterPhAnim="0" showMasterSp="0">
-  <p:cSld>
-    <p:spTree>
-      <p:nvGrpSpPr>
-        <p:cNvPr id="233" name="Shape 233"/>
-        <p:cNvGrpSpPr/>
-        <p:nvPr/>
-      </p:nvGrpSpPr>
-      <p:grpSpPr>
-        <a:xfrm>
-          <a:off x="0" y="0"/>
-          <a:ext cx="0" cy="0"/>
-          <a:chOff x="0" y="0"/>
-          <a:chExt cx="0" cy="0"/>
-        </a:xfrm>
-      </p:grpSpPr>
-      <p:sp>
-        <p:nvSpPr>
-          <p:cNvPr id="234" name="Google Shape;234;g3bbeee67e43_0_147:notes"/>
-          <p:cNvSpPr/>
-          <p:nvPr>
-            <p:ph idx="2" type="sldImg"/>
-          </p:nvPr>
-        </p:nvSpPr>
-        <p:spPr>
-          <a:xfrm>
-            <a:off x="1143309" y="685800"/>
-            <a:ext cx="4572000" cy="3429000"/>
-          </a:xfrm>
-          <a:custGeom>
-            <a:rect b="b" l="l" r="r" t="t"/>
-            <a:pathLst>
-              <a:path extrusionOk="0" h="120000" w="120000">
-                <a:moveTo>
-                  <a:pt x="0" y="0"/>
-                </a:moveTo>
-                <a:lnTo>
-                  <a:pt x="120000" y="0"/>
-                </a:lnTo>
-                <a:lnTo>
-                  <a:pt x="120000" y="120000"/>
-                </a:lnTo>
-                <a:lnTo>
-                  <a:pt x="0" y="120000"/>
-                </a:lnTo>
-                <a:close/>
-              </a:path>
-            </a:pathLst>
-          </a:custGeom>
-          <a:noFill/>
-          <a:ln cap="flat" cmpd="sng" w="9525">
-            <a:solidFill>
-              <a:srgbClr val="000000"/>
-            </a:solidFill>
-            <a:prstDash val="solid"/>
-            <a:round/>
-            <a:headEnd len="sm" w="sm" type="none"/>
-            <a:tailEnd len="sm" w="sm" type="none"/>
-          </a:ln>
-        </p:spPr>
-      </p:sp>
-      <p:sp>
-        <p:nvSpPr>
-          <p:cNvPr id="235" name="Google Shape;235;g3bbeee67e43_0_147:notes"/>
-          <p:cNvSpPr txBox="1"/>
-          <p:nvPr>
-            <p:ph idx="1" type="body"/>
-          </p:nvPr>
-        </p:nvSpPr>
-        <p:spPr>
-          <a:xfrm>
-            <a:off x="685800" y="4343400"/>
-            <a:ext cx="5486400" cy="4114800"/>
-          </a:xfrm>
-          <a:prstGeom prst="rect">
-            <a:avLst/>
-          </a:prstGeom>
-          <a:noFill/>
-          <a:ln>
-            <a:noFill/>
-          </a:ln>
-        </p:spPr>
-        <p:txBody>
-          <a:bodyPr anchorCtr="0" anchor="t" bIns="91425" lIns="91425" spcFirstLastPara="1" rIns="91425" wrap="square" tIns="91425">
-            <a:noAutofit/>
-          </a:bodyPr>
-          <a:lstStyle/>
-          <a:p>
-            <a:pPr indent="0" lvl="0" marL="0" rtl="0" algn="l">
-              <a:lnSpc>
-                <a:spcPct val="100000"/>
-              </a:lnSpc>
-              <a:spcBef>
-                <a:spcPts val="0"/>
-              </a:spcBef>
-              <a:spcAft>
-                <a:spcPts val="0"/>
-              </a:spcAft>
-              <a:buSzPts val="1400"/>
-              <a:buNone/>
-            </a:pPr>
-            <a:r>
-              <a:t/>
-            </a:r>
-            <a:endParaRPr/>
-          </a:p>
-        </p:txBody>
-      </p:sp>
-    </p:spTree>
-  </p:cSld>
-  <p:clrMapOvr>
-    <a:masterClrMapping/>
-  </p:clrMapOvr>
-</p:notes>
-</file>
-
-<file path=ppt/notesSlides/notesSlide24.xml><?xml version="1.0" encoding="utf-8"?>
-<p:notes xmlns:a="http://schemas.openxmlformats.org/drawingml/2006/main" xmlns:r="http://schemas.openxmlformats.org/officeDocument/2006/relationships" xmlns:mc="http://schemas.openxmlformats.org/markup-compatibility/2006" xmlns:mv="urn:schemas-microsoft-com:mac:vml" xmlns:p="http://schemas.openxmlformats.org/presentationml/2006/main" xmlns:c="http://schemas.openxmlformats.org/drawingml/2006/chart" xmlns:dgm="http://schemas.openxmlformats.org/drawingml/2006/diagram" xmlns:o="urn:schemas-microsoft-com:office:office" xmlns:v="urn:schemas-microsoft-com:vml" xmlns:pvml="urn:schemas-microsoft-com:office:powerpoint" xmlns:com="http://schemas.openxmlformats.org/drawingml/2006/compatibility" xmlns:p14="http://schemas.microsoft.com/office/powerpoint/2010/main" xmlns:p15="http://schemas.microsoft.com/office/powerpoint/2012/main" xmlns:ahyp="http://schemas.microsoft.com/office/drawing/2018/hyperlinkcolor" showMasterPhAnim="0" showMasterSp="0">
-  <p:cSld>
-    <p:spTree>
-      <p:nvGrpSpPr>
-        <p:cNvPr id="239" name="Shape 239"/>
-        <p:cNvGrpSpPr/>
-        <p:nvPr/>
-      </p:nvGrpSpPr>
-      <p:grpSpPr>
-        <a:xfrm>
-          <a:off x="0" y="0"/>
-          <a:ext cx="0" cy="0"/>
-          <a:chOff x="0" y="0"/>
-          <a:chExt cx="0" cy="0"/>
-        </a:xfrm>
-      </p:grpSpPr>
-      <p:sp>
-        <p:nvSpPr>
-          <p:cNvPr id="240" name="Google Shape;240;g3bbeee67e43_0_142:notes"/>
-          <p:cNvSpPr/>
-          <p:nvPr>
-            <p:ph idx="2" type="sldImg"/>
-          </p:nvPr>
-        </p:nvSpPr>
-        <p:spPr>
-          <a:xfrm>
-            <a:off x="1143309" y="685800"/>
-            <a:ext cx="4572000" cy="3429000"/>
-          </a:xfrm>
-          <a:custGeom>
-            <a:rect b="b" l="l" r="r" t="t"/>
-            <a:pathLst>
-              <a:path extrusionOk="0" h="120000" w="120000">
-                <a:moveTo>
-                  <a:pt x="0" y="0"/>
-                </a:moveTo>
-                <a:lnTo>
-                  <a:pt x="120000" y="0"/>
-                </a:lnTo>
-                <a:lnTo>
-                  <a:pt x="120000" y="120000"/>
-                </a:lnTo>
-                <a:lnTo>
-                  <a:pt x="0" y="120000"/>
-                </a:lnTo>
-                <a:close/>
-              </a:path>
-            </a:pathLst>
-          </a:custGeom>
-          <a:noFill/>
-          <a:ln cap="flat" cmpd="sng" w="9525">
-            <a:solidFill>
-              <a:srgbClr val="000000"/>
-            </a:solidFill>
-            <a:prstDash val="solid"/>
-            <a:round/>
-            <a:headEnd len="sm" w="sm" type="none"/>
-            <a:tailEnd len="sm" w="sm" type="none"/>
-          </a:ln>
-        </p:spPr>
-      </p:sp>
-      <p:sp>
-        <p:nvSpPr>
-          <p:cNvPr id="241" name="Google Shape;241;g3bbeee67e43_0_142:notes"/>
-          <p:cNvSpPr txBox="1"/>
-          <p:nvPr>
-            <p:ph idx="1" type="body"/>
-          </p:nvPr>
-        </p:nvSpPr>
-        <p:spPr>
-          <a:xfrm>
-            <a:off x="685800" y="4343400"/>
-            <a:ext cx="5486400" cy="4114800"/>
-          </a:xfrm>
-          <a:prstGeom prst="rect">
-            <a:avLst/>
-          </a:prstGeom>
-          <a:noFill/>
-          <a:ln>
-            <a:noFill/>
-          </a:ln>
-        </p:spPr>
-        <p:txBody>
-          <a:bodyPr anchorCtr="0" anchor="t" bIns="91425" lIns="91425" spcFirstLastPara="1" rIns="91425" wrap="square" tIns="91425">
-            <a:noAutofit/>
-          </a:bodyPr>
-          <a:lstStyle/>
-          <a:p>
-            <a:pPr indent="0" lvl="0" marL="0" rtl="0" algn="l">
-              <a:lnSpc>
-                <a:spcPct val="100000"/>
-              </a:lnSpc>
-              <a:spcBef>
-                <a:spcPts val="0"/>
-              </a:spcBef>
-              <a:spcAft>
-                <a:spcPts val="0"/>
-              </a:spcAft>
-              <a:buSzPts val="1400"/>
-              <a:buNone/>
-            </a:pPr>
-            <a:r>
-              <a:t/>
-            </a:r>
-            <a:endParaRPr/>
-          </a:p>
-        </p:txBody>
-      </p:sp>
-    </p:spTree>
-  </p:cSld>
-  <p:clrMapOvr>
-    <a:masterClrMapping/>
-  </p:clrMapOvr>
-</p:notes>
-</file>
-
-<file path=ppt/notesSlides/notesSlide25.xml><?xml version="1.0" encoding="utf-8"?>
-<p:notes xmlns:a="http://schemas.openxmlformats.org/drawingml/2006/main" xmlns:r="http://schemas.openxmlformats.org/officeDocument/2006/relationships" xmlns:mc="http://schemas.openxmlformats.org/markup-compatibility/2006" xmlns:mv="urn:schemas-microsoft-com:mac:vml" xmlns:p="http://schemas.openxmlformats.org/presentationml/2006/main" xmlns:c="http://schemas.openxmlformats.org/drawingml/2006/chart" xmlns:dgm="http://schemas.openxmlformats.org/drawingml/2006/diagram" xmlns:o="urn:schemas-microsoft-com:office:office" xmlns:v="urn:schemas-microsoft-com:vml" xmlns:pvml="urn:schemas-microsoft-com:office:powerpoint" xmlns:com="http://schemas.openxmlformats.org/drawingml/2006/compatibility" xmlns:p14="http://schemas.microsoft.com/office/powerpoint/2010/main" xmlns:p15="http://schemas.microsoft.com/office/powerpoint/2012/main" xmlns:ahyp="http://schemas.microsoft.com/office/drawing/2018/hyperlinkcolor" showMasterPhAnim="0" showMasterSp="0">
-  <p:cSld>
-    <p:spTree>
-      <p:nvGrpSpPr>
-        <p:cNvPr id="245" name="Shape 245"/>
-        <p:cNvGrpSpPr/>
-        <p:nvPr/>
-      </p:nvGrpSpPr>
-      <p:grpSpPr>
-        <a:xfrm>
-          <a:off x="0" y="0"/>
-          <a:ext cx="0" cy="0"/>
-          <a:chOff x="0" y="0"/>
-          <a:chExt cx="0" cy="0"/>
-        </a:xfrm>
-      </p:grpSpPr>
-      <p:sp>
-        <p:nvSpPr>
-          <p:cNvPr id="246" name="Google Shape;246;g3bbeee67e43_0_93:notes"/>
-          <p:cNvSpPr/>
-          <p:nvPr>
-            <p:ph idx="2" type="sldImg"/>
-          </p:nvPr>
-        </p:nvSpPr>
-        <p:spPr>
-          <a:xfrm>
-            <a:off x="1143309" y="685800"/>
-            <a:ext cx="4572000" cy="3429000"/>
-          </a:xfrm>
-          <a:custGeom>
-            <a:rect b="b" l="l" r="r" t="t"/>
-            <a:pathLst>
-              <a:path extrusionOk="0" h="120000" w="120000">
-                <a:moveTo>
-                  <a:pt x="0" y="0"/>
-                </a:moveTo>
-                <a:lnTo>
-                  <a:pt x="120000" y="0"/>
-                </a:lnTo>
-                <a:lnTo>
-                  <a:pt x="120000" y="120000"/>
-                </a:lnTo>
-                <a:lnTo>
-                  <a:pt x="0" y="120000"/>
-                </a:lnTo>
-                <a:close/>
-              </a:path>
-            </a:pathLst>
-          </a:custGeom>
-        </p:spPr>
-      </p:sp>
-      <p:sp>
-        <p:nvSpPr>
-          <p:cNvPr id="247" name="Google Shape;247;g3bbeee67e43_0_93:notes"/>
-          <p:cNvSpPr txBox="1"/>
-          <p:nvPr>
-            <p:ph idx="1" type="body"/>
-          </p:nvPr>
-        </p:nvSpPr>
-        <p:spPr>
-          <a:xfrm>
-            <a:off x="685800" y="4343400"/>
-            <a:ext cx="5486400" cy="4114800"/>
-          </a:xfrm>
-          <a:prstGeom prst="rect">
-            <a:avLst/>
-          </a:prstGeom>
-        </p:spPr>
-        <p:txBody>
-          <a:bodyPr anchorCtr="0" anchor="t" bIns="91425" lIns="91425" spcFirstLastPara="1" rIns="91425" wrap="square" tIns="91425">
-            <a:noAutofit/>
-          </a:bodyPr>
-          <a:lstStyle/>
-          <a:p>
-            <a:pPr indent="0" lvl="0" marL="0" rtl="0" algn="l">
-              <a:spcBef>
-                <a:spcPts val="0"/>
-              </a:spcBef>
-              <a:spcAft>
-                <a:spcPts val="0"/>
-              </a:spcAft>
               <a:buNone/>
             </a:pPr>
             <a:r>
@@ -12688,123 +11780,7 @@
       </p:grpSpPr>
       <p:sp>
         <p:nvSpPr>
-          <p:cNvPr id="178" name="Google Shape;178;g3bbeee67e43_0_26"/>
-          <p:cNvSpPr txBox="1"/>
-          <p:nvPr>
-            <p:ph type="ctrTitle"/>
-          </p:nvPr>
-        </p:nvSpPr>
-        <p:spPr>
-          <a:xfrm>
-            <a:off x="685800" y="2655750"/>
-            <a:ext cx="7772400" cy="1546500"/>
-          </a:xfrm>
-          <a:prstGeom prst="rect">
-            <a:avLst/>
-          </a:prstGeom>
-          <a:noFill/>
-          <a:ln>
-            <a:noFill/>
-          </a:ln>
-        </p:spPr>
-        <p:txBody>
-          <a:bodyPr anchorCtr="0" anchor="ctr" bIns="91425" lIns="91425" spcFirstLastPara="1" rIns="91425" wrap="square" tIns="91425">
-            <a:noAutofit/>
-          </a:bodyPr>
-          <a:lstStyle/>
-          <a:p>
-            <a:pPr indent="0" lvl="0" marL="0" rtl="0" algn="ctr">
-              <a:lnSpc>
-                <a:spcPct val="100000"/>
-              </a:lnSpc>
-              <a:spcBef>
-                <a:spcPts val="0"/>
-              </a:spcBef>
-              <a:spcAft>
-                <a:spcPts val="0"/>
-              </a:spcAft>
-              <a:buSzPts val="4800"/>
-              <a:buNone/>
-            </a:pPr>
-            <a:r>
-              <a:rPr lang="en">
-                <a:solidFill>
-                  <a:srgbClr val="002B5B"/>
-                </a:solidFill>
-              </a:rPr>
-              <a:t>CSE </a:t>
-            </a:r>
-            <a:r>
-              <a:rPr lang="en"/>
-              <a:t>1</a:t>
-            </a:r>
-            <a:r>
-              <a:rPr lang="en">
-                <a:solidFill>
-                  <a:srgbClr val="002B5B"/>
-                </a:solidFill>
-              </a:rPr>
-              <a:t>0124</a:t>
-            </a:r>
-            <a:br>
-              <a:rPr lang="en">
-                <a:solidFill>
-                  <a:srgbClr val="002B5B"/>
-                </a:solidFill>
-              </a:rPr>
-            </a:br>
-            <a:r>
-              <a:rPr lang="en">
-                <a:solidFill>
-                  <a:srgbClr val="DCB439"/>
-                </a:solidFill>
-              </a:rPr>
-              <a:t>Embeddings</a:t>
-            </a:r>
-            <a:r>
-              <a:rPr lang="en">
-                <a:solidFill>
-                  <a:srgbClr val="DCB439"/>
-                </a:solidFill>
-              </a:rPr>
-              <a:t> 01</a:t>
-            </a:r>
-            <a:endParaRPr>
-              <a:solidFill>
-                <a:srgbClr val="DCB439"/>
-              </a:solidFill>
-            </a:endParaRPr>
-          </a:p>
-        </p:txBody>
-      </p:sp>
-    </p:spTree>
-  </p:cSld>
-  <p:clrMapOvr>
-    <a:masterClrMapping/>
-  </p:clrMapOvr>
-</p:sld>
-</file>
-
-<file path=ppt/slides/slide17.xml><?xml version="1.0" encoding="utf-8"?>
-<p:sld xmlns:a="http://schemas.openxmlformats.org/drawingml/2006/main" xmlns:r="http://schemas.openxmlformats.org/officeDocument/2006/relationships" xmlns:mc="http://schemas.openxmlformats.org/markup-compatibility/2006" xmlns:mv="urn:schemas-microsoft-com:mac:vml" xmlns:p="http://schemas.openxmlformats.org/presentationml/2006/main" xmlns:c="http://schemas.openxmlformats.org/drawingml/2006/chart" xmlns:dgm="http://schemas.openxmlformats.org/drawingml/2006/diagram" xmlns:o="urn:schemas-microsoft-com:office:office" xmlns:v="urn:schemas-microsoft-com:vml" xmlns:pvml="urn:schemas-microsoft-com:office:powerpoint" xmlns:com="http://schemas.openxmlformats.org/drawingml/2006/compatibility" xmlns:p14="http://schemas.microsoft.com/office/powerpoint/2010/main" xmlns:p15="http://schemas.microsoft.com/office/powerpoint/2012/main" xmlns:ahyp="http://schemas.microsoft.com/office/drawing/2018/hyperlinkcolor">
-  <p:cSld>
-    <p:spTree>
-      <p:nvGrpSpPr>
-        <p:cNvPr id="182" name="Shape 182"/>
-        <p:cNvGrpSpPr/>
-        <p:nvPr/>
-      </p:nvGrpSpPr>
-      <p:grpSpPr>
-        <a:xfrm>
-          <a:off x="0" y="0"/>
-          <a:ext cx="0" cy="0"/>
-          <a:chOff x="0" y="0"/>
-          <a:chExt cx="0" cy="0"/>
-        </a:xfrm>
-      </p:grpSpPr>
-      <p:sp>
-        <p:nvSpPr>
-          <p:cNvPr id="183" name="Google Shape;183;g3bbeee67e43_0_44"/>
+          <p:cNvPr id="178" name="Google Shape;178;g3bbeee67e43_0_44"/>
           <p:cNvSpPr txBox="1"/>
           <p:nvPr>
             <p:ph type="title"/>
@@ -12844,7 +11820,7 @@
       </p:sp>
       <p:sp>
         <p:nvSpPr>
-          <p:cNvPr id="184" name="Google Shape;184;g3bbeee67e43_0_44"/>
+          <p:cNvPr id="179" name="Google Shape;179;g3bbeee67e43_0_44"/>
           <p:cNvSpPr txBox="1"/>
           <p:nvPr>
             <p:ph idx="1" type="body"/>
@@ -12892,7 +11868,7 @@
       </p:sp>
       <p:pic>
         <p:nvPicPr>
-          <p:cNvPr id="185" name="Google Shape;185;g3bbeee67e43_0_44" title="Screenshot 2026-01-27 at 11.03.21 AM.png"/>
+          <p:cNvPr id="180" name="Google Shape;180;g3bbeee67e43_0_44" title="Screenshot 2026-01-27 at 11.03.21 AM.png"/>
           <p:cNvPicPr preferRelativeResize="0"/>
           <p:nvPr/>
         </p:nvPicPr>
@@ -12920,7 +11896,7 @@
       </p:pic>
       <p:pic>
         <p:nvPicPr>
-          <p:cNvPr id="186" name="Google Shape;186;g3bbeee67e43_0_44" title="Screenshot 2026-01-27 at 11.04.18 AM.png"/>
+          <p:cNvPr id="181" name="Google Shape;181;g3bbeee67e43_0_44" title="Screenshot 2026-01-27 at 11.04.18 AM.png"/>
           <p:cNvPicPr preferRelativeResize="0"/>
           <p:nvPr/>
         </p:nvPicPr>
@@ -12954,12 +11930,12 @@
 </p:sld>
 </file>
 
-<file path=ppt/slides/slide18.xml><?xml version="1.0" encoding="utf-8"?>
+<file path=ppt/slides/slide17.xml><?xml version="1.0" encoding="utf-8"?>
 <p:sld xmlns:a="http://schemas.openxmlformats.org/drawingml/2006/main" xmlns:r="http://schemas.openxmlformats.org/officeDocument/2006/relationships" xmlns:mc="http://schemas.openxmlformats.org/markup-compatibility/2006" xmlns:mv="urn:schemas-microsoft-com:mac:vml" xmlns:p="http://schemas.openxmlformats.org/presentationml/2006/main" xmlns:c="http://schemas.openxmlformats.org/drawingml/2006/chart" xmlns:dgm="http://schemas.openxmlformats.org/drawingml/2006/diagram" xmlns:o="urn:schemas-microsoft-com:office:office" xmlns:v="urn:schemas-microsoft-com:vml" xmlns:pvml="urn:schemas-microsoft-com:office:powerpoint" xmlns:com="http://schemas.openxmlformats.org/drawingml/2006/compatibility" xmlns:p14="http://schemas.microsoft.com/office/powerpoint/2010/main" xmlns:p15="http://schemas.microsoft.com/office/powerpoint/2012/main" xmlns:ahyp="http://schemas.microsoft.com/office/drawing/2018/hyperlinkcolor">
   <p:cSld>
     <p:spTree>
       <p:nvGrpSpPr>
-        <p:cNvPr id="190" name="Shape 190"/>
+        <p:cNvPr id="185" name="Shape 185"/>
         <p:cNvGrpSpPr/>
         <p:nvPr/>
       </p:nvGrpSpPr>
@@ -12973,7 +11949,7 @@
       </p:grpSpPr>
       <p:sp>
         <p:nvSpPr>
-          <p:cNvPr id="191" name="Google Shape;191;g3bbeee67e43_0_53"/>
+          <p:cNvPr id="186" name="Google Shape;186;g3bbeee67e43_0_53"/>
           <p:cNvSpPr txBox="1"/>
           <p:nvPr>
             <p:ph type="title"/>
@@ -13013,7 +11989,7 @@
       </p:sp>
       <p:pic>
         <p:nvPicPr>
-          <p:cNvPr id="192" name="Google Shape;192;g3bbeee67e43_0_53" title="Screenshot 2026-01-27 at 11.06.13 AM.png"/>
+          <p:cNvPr id="187" name="Google Shape;187;g3bbeee67e43_0_53" title="Screenshot 2026-01-27 at 11.06.13 AM.png"/>
           <p:cNvPicPr preferRelativeResize="0"/>
           <p:nvPr/>
         </p:nvPicPr>
@@ -13041,7 +12017,7 @@
       </p:pic>
       <p:pic>
         <p:nvPicPr>
-          <p:cNvPr id="193" name="Google Shape;193;g3bbeee67e43_0_53" title="Screenshot 2026-01-27 at 11.06.43 AM.png"/>
+          <p:cNvPr id="188" name="Google Shape;188;g3bbeee67e43_0_53" title="Screenshot 2026-01-27 at 11.06.43 AM.png"/>
           <p:cNvPicPr preferRelativeResize="0"/>
           <p:nvPr/>
         </p:nvPicPr>
@@ -13069,7 +12045,7 @@
       </p:pic>
       <p:pic>
         <p:nvPicPr>
-          <p:cNvPr id="194" name="Google Shape;194;g3bbeee67e43_0_53" title="Screenshot 2026-01-27 at 11.12.02 AM.png"/>
+          <p:cNvPr id="189" name="Google Shape;189;g3bbeee67e43_0_53" title="Screenshot 2026-01-27 at 11.12.02 AM.png"/>
           <p:cNvPicPr preferRelativeResize="0"/>
           <p:nvPr/>
         </p:nvPicPr>
@@ -13097,7 +12073,7 @@
       </p:pic>
       <p:pic>
         <p:nvPicPr>
-          <p:cNvPr id="195" name="Google Shape;195;g3bbeee67e43_0_53" title="Screenshot 2026-01-27 at 11.12.43 AM.png"/>
+          <p:cNvPr id="190" name="Google Shape;190;g3bbeee67e43_0_53" title="Screenshot 2026-01-27 at 11.12.43 AM.png"/>
           <p:cNvPicPr preferRelativeResize="0"/>
           <p:nvPr/>
         </p:nvPicPr>
@@ -13125,7 +12101,7 @@
       </p:pic>
       <p:pic>
         <p:nvPicPr>
-          <p:cNvPr id="196" name="Google Shape;196;g3bbeee67e43_0_53" title="Screenshot 2026-01-27 at 11.12.59 AM.png"/>
+          <p:cNvPr id="191" name="Google Shape;191;g3bbeee67e43_0_53" title="Screenshot 2026-01-27 at 11.12.59 AM.png"/>
           <p:cNvPicPr preferRelativeResize="0"/>
           <p:nvPr/>
         </p:nvPicPr>
@@ -13153,7 +12129,7 @@
       </p:pic>
       <p:sp>
         <p:nvSpPr>
-          <p:cNvPr id="197" name="Google Shape;197;g3bbeee67e43_0_53"/>
+          <p:cNvPr id="192" name="Google Shape;192;g3bbeee67e43_0_53"/>
           <p:cNvSpPr/>
           <p:nvPr/>
         </p:nvSpPr>
@@ -13200,7 +12176,7 @@
       </p:sp>
       <p:sp>
         <p:nvSpPr>
-          <p:cNvPr id="198" name="Google Shape;198;g3bbeee67e43_0_53"/>
+          <p:cNvPr id="193" name="Google Shape;193;g3bbeee67e43_0_53"/>
           <p:cNvSpPr/>
           <p:nvPr/>
         </p:nvSpPr>
@@ -13247,10 +12223,10 @@
       </p:sp>
       <p:cxnSp>
         <p:nvCxnSpPr>
-          <p:cNvPr id="199" name="Google Shape;199;g3bbeee67e43_0_53"/>
+          <p:cNvPr id="194" name="Google Shape;194;g3bbeee67e43_0_53"/>
           <p:cNvCxnSpPr>
-            <a:stCxn id="197" idx="3"/>
-            <a:endCxn id="198" idx="0"/>
+            <a:stCxn id="192" idx="3"/>
+            <a:endCxn id="193" idx="0"/>
           </p:cNvCxnSpPr>
           <p:nvPr/>
         </p:nvCxnSpPr>
@@ -13276,7 +12252,7 @@
       </p:cxnSp>
       <p:sp>
         <p:nvSpPr>
-          <p:cNvPr id="200" name="Google Shape;200;g3bbeee67e43_0_53"/>
+          <p:cNvPr id="195" name="Google Shape;195;g3bbeee67e43_0_53"/>
           <p:cNvSpPr/>
           <p:nvPr/>
         </p:nvSpPr>
@@ -13323,7 +12299,7 @@
       </p:sp>
       <p:sp>
         <p:nvSpPr>
-          <p:cNvPr id="201" name="Google Shape;201;g3bbeee67e43_0_53"/>
+          <p:cNvPr id="196" name="Google Shape;196;g3bbeee67e43_0_53"/>
           <p:cNvSpPr/>
           <p:nvPr/>
         </p:nvSpPr>
@@ -13370,7 +12346,7 @@
       </p:sp>
       <p:sp>
         <p:nvSpPr>
-          <p:cNvPr id="202" name="Google Shape;202;g3bbeee67e43_0_53"/>
+          <p:cNvPr id="197" name="Google Shape;197;g3bbeee67e43_0_53"/>
           <p:cNvSpPr/>
           <p:nvPr/>
         </p:nvSpPr>
@@ -13417,9 +12393,9 @@
       </p:sp>
       <p:cxnSp>
         <p:nvCxnSpPr>
-          <p:cNvPr id="203" name="Google Shape;203;g3bbeee67e43_0_53"/>
+          <p:cNvPr id="198" name="Google Shape;198;g3bbeee67e43_0_53"/>
           <p:cNvCxnSpPr>
-            <a:endCxn id="201" idx="2"/>
+            <a:endCxn id="196" idx="2"/>
           </p:cNvCxnSpPr>
           <p:nvPr/>
         </p:nvCxnSpPr>
@@ -13445,10 +12421,10 @@
       </p:cxnSp>
       <p:cxnSp>
         <p:nvCxnSpPr>
-          <p:cNvPr id="204" name="Google Shape;204;g3bbeee67e43_0_53"/>
+          <p:cNvPr id="199" name="Google Shape;199;g3bbeee67e43_0_53"/>
           <p:cNvCxnSpPr>
-            <a:stCxn id="200" idx="3"/>
-            <a:endCxn id="202" idx="2"/>
+            <a:stCxn id="195" idx="3"/>
+            <a:endCxn id="197" idx="2"/>
           </p:cNvCxnSpPr>
           <p:nvPr/>
         </p:nvCxnSpPr>
@@ -13474,7 +12450,7 @@
       </p:cxnSp>
       <p:sp>
         <p:nvSpPr>
-          <p:cNvPr id="205" name="Google Shape;205;g3bbeee67e43_0_53"/>
+          <p:cNvPr id="200" name="Google Shape;200;g3bbeee67e43_0_53"/>
           <p:cNvSpPr/>
           <p:nvPr/>
         </p:nvSpPr>
@@ -13521,7 +12497,7 @@
       </p:sp>
       <p:sp>
         <p:nvSpPr>
-          <p:cNvPr id="206" name="Google Shape;206;g3bbeee67e43_0_53"/>
+          <p:cNvPr id="201" name="Google Shape;201;g3bbeee67e43_0_53"/>
           <p:cNvSpPr/>
           <p:nvPr/>
         </p:nvSpPr>
@@ -13568,10 +12544,10 @@
       </p:sp>
       <p:cxnSp>
         <p:nvCxnSpPr>
-          <p:cNvPr id="207" name="Google Shape;207;g3bbeee67e43_0_53"/>
+          <p:cNvPr id="202" name="Google Shape;202;g3bbeee67e43_0_53"/>
           <p:cNvCxnSpPr>
-            <a:stCxn id="206" idx="0"/>
-            <a:endCxn id="205" idx="1"/>
+            <a:stCxn id="201" idx="0"/>
+            <a:endCxn id="200" idx="1"/>
           </p:cNvCxnSpPr>
           <p:nvPr/>
         </p:nvCxnSpPr>
@@ -13597,10 +12573,10 @@
       </p:cxnSp>
       <p:cxnSp>
         <p:nvCxnSpPr>
-          <p:cNvPr id="208" name="Google Shape;208;g3bbeee67e43_0_53"/>
+          <p:cNvPr id="203" name="Google Shape;203;g3bbeee67e43_0_53"/>
           <p:cNvCxnSpPr>
-            <a:stCxn id="198" idx="0"/>
-            <a:endCxn id="200" idx="1"/>
+            <a:stCxn id="193" idx="0"/>
+            <a:endCxn id="195" idx="1"/>
           </p:cNvCxnSpPr>
           <p:nvPr/>
         </p:nvCxnSpPr>
@@ -13624,123 +12600,6 @@
           </a:ln>
         </p:spPr>
       </p:cxnSp>
-    </p:spTree>
-  </p:cSld>
-  <p:clrMapOvr>
-    <a:masterClrMapping/>
-  </p:clrMapOvr>
-</p:sld>
-</file>
-
-<file path=ppt/slides/slide19.xml><?xml version="1.0" encoding="utf-8"?>
-<p:sld xmlns:a="http://schemas.openxmlformats.org/drawingml/2006/main" xmlns:r="http://schemas.openxmlformats.org/officeDocument/2006/relationships" xmlns:mc="http://schemas.openxmlformats.org/markup-compatibility/2006" xmlns:mv="urn:schemas-microsoft-com:mac:vml" xmlns:p="http://schemas.openxmlformats.org/presentationml/2006/main" xmlns:c="http://schemas.openxmlformats.org/drawingml/2006/chart" xmlns:dgm="http://schemas.openxmlformats.org/drawingml/2006/diagram" xmlns:o="urn:schemas-microsoft-com:office:office" xmlns:v="urn:schemas-microsoft-com:vml" xmlns:pvml="urn:schemas-microsoft-com:office:powerpoint" xmlns:com="http://schemas.openxmlformats.org/drawingml/2006/compatibility" xmlns:p14="http://schemas.microsoft.com/office/powerpoint/2010/main" xmlns:p15="http://schemas.microsoft.com/office/powerpoint/2012/main" xmlns:ahyp="http://schemas.microsoft.com/office/drawing/2018/hyperlinkcolor">
-  <p:cSld>
-    <p:spTree>
-      <p:nvGrpSpPr>
-        <p:cNvPr id="212" name="Shape 212"/>
-        <p:cNvGrpSpPr/>
-        <p:nvPr/>
-      </p:nvGrpSpPr>
-      <p:grpSpPr>
-        <a:xfrm>
-          <a:off x="0" y="0"/>
-          <a:ext cx="0" cy="0"/>
-          <a:chOff x="0" y="0"/>
-          <a:chExt cx="0" cy="0"/>
-        </a:xfrm>
-      </p:grpSpPr>
-      <p:sp>
-        <p:nvSpPr>
-          <p:cNvPr id="213" name="Google Shape;213;g3bbeee67e43_0_98"/>
-          <p:cNvSpPr txBox="1"/>
-          <p:nvPr>
-            <p:ph type="title"/>
-          </p:nvPr>
-        </p:nvSpPr>
-        <p:spPr>
-          <a:xfrm>
-            <a:off x="457200" y="274638"/>
-            <a:ext cx="8229600" cy="1143000"/>
-          </a:xfrm>
-          <a:prstGeom prst="rect">
-            <a:avLst/>
-          </a:prstGeom>
-        </p:spPr>
-        <p:txBody>
-          <a:bodyPr anchorCtr="0" anchor="b" bIns="91425" lIns="91425" spcFirstLastPara="1" rIns="91425" wrap="square" tIns="91425">
-            <a:noAutofit/>
-          </a:bodyPr>
-          <a:lstStyle/>
-          <a:p>
-            <a:pPr indent="0" lvl="0" marL="0" rtl="0" algn="l">
-              <a:spcBef>
-                <a:spcPts val="0"/>
-              </a:spcBef>
-              <a:spcAft>
-                <a:spcPts val="0"/>
-              </a:spcAft>
-              <a:buNone/>
-            </a:pPr>
-            <a:r>
-              <a:rPr lang="en"/>
-              <a:t>GPA Predicting Dataset</a:t>
-            </a:r>
-            <a:endParaRPr/>
-          </a:p>
-        </p:txBody>
-      </p:sp>
-      <p:sp>
-        <p:nvSpPr>
-          <p:cNvPr id="214" name="Google Shape;214;g3bbeee67e43_0_98"/>
-          <p:cNvSpPr txBox="1"/>
-          <p:nvPr>
-            <p:ph idx="1" type="body"/>
-          </p:nvPr>
-        </p:nvSpPr>
-        <p:spPr>
-          <a:xfrm>
-            <a:off x="457200" y="1600200"/>
-            <a:ext cx="8229600" cy="4967700"/>
-          </a:xfrm>
-          <a:prstGeom prst="rect">
-            <a:avLst/>
-          </a:prstGeom>
-        </p:spPr>
-        <p:txBody>
-          <a:bodyPr anchorCtr="0" anchor="t" bIns="91425" lIns="91425" spcFirstLastPara="1" rIns="91425" wrap="square" tIns="91425">
-            <a:noAutofit/>
-          </a:bodyPr>
-          <a:lstStyle/>
-          <a:p>
-            <a:pPr indent="0" lvl="0" marL="0" rtl="0" algn="l">
-              <a:spcBef>
-                <a:spcPts val="600"/>
-              </a:spcBef>
-              <a:spcAft>
-                <a:spcPts val="0"/>
-              </a:spcAft>
-              <a:buNone/>
-            </a:pPr>
-            <a:r>
-              <a:rPr lang="en"/>
-              <a:t>Lets design a dataset to </a:t>
-            </a:r>
-            <a:r>
-              <a:rPr b="1" lang="en">
-                <a:solidFill>
-                  <a:srgbClr val="A31515"/>
-                </a:solidFill>
-              </a:rPr>
-              <a:t>predict whether incoming students will graduate or not</a:t>
-            </a:r>
-            <a:endParaRPr b="1">
-              <a:solidFill>
-                <a:srgbClr val="A31515"/>
-              </a:solidFill>
-            </a:endParaRPr>
-          </a:p>
-        </p:txBody>
-      </p:sp>
     </p:spTree>
   </p:cSld>
   <p:clrMapOvr>
@@ -13890,1512 +12749,6 @@
           </a:ln>
         </p:spPr>
       </p:pic>
-    </p:spTree>
-  </p:cSld>
-  <p:clrMapOvr>
-    <a:masterClrMapping/>
-  </p:clrMapOvr>
-</p:sld>
-</file>
-
-<file path=ppt/slides/slide20.xml><?xml version="1.0" encoding="utf-8"?>
-<p:sld xmlns:a="http://schemas.openxmlformats.org/drawingml/2006/main" xmlns:r="http://schemas.openxmlformats.org/officeDocument/2006/relationships" xmlns:mc="http://schemas.openxmlformats.org/markup-compatibility/2006" xmlns:mv="urn:schemas-microsoft-com:mac:vml" xmlns:p="http://schemas.openxmlformats.org/presentationml/2006/main" xmlns:c="http://schemas.openxmlformats.org/drawingml/2006/chart" xmlns:dgm="http://schemas.openxmlformats.org/drawingml/2006/diagram" xmlns:o="urn:schemas-microsoft-com:office:office" xmlns:v="urn:schemas-microsoft-com:vml" xmlns:pvml="urn:schemas-microsoft-com:office:powerpoint" xmlns:com="http://schemas.openxmlformats.org/drawingml/2006/compatibility" xmlns:p14="http://schemas.microsoft.com/office/powerpoint/2010/main" xmlns:p15="http://schemas.microsoft.com/office/powerpoint/2012/main" xmlns:ahyp="http://schemas.microsoft.com/office/drawing/2018/hyperlinkcolor">
-  <p:cSld>
-    <p:spTree>
-      <p:nvGrpSpPr>
-        <p:cNvPr id="218" name="Shape 218"/>
-        <p:cNvGrpSpPr/>
-        <p:nvPr/>
-      </p:nvGrpSpPr>
-      <p:grpSpPr>
-        <a:xfrm>
-          <a:off x="0" y="0"/>
-          <a:ext cx="0" cy="0"/>
-          <a:chOff x="0" y="0"/>
-          <a:chExt cx="0" cy="0"/>
-        </a:xfrm>
-      </p:grpSpPr>
-      <p:sp>
-        <p:nvSpPr>
-          <p:cNvPr id="219" name="Google Shape;219;g3bbeee67e43_0_137"/>
-          <p:cNvSpPr txBox="1"/>
-          <p:nvPr>
-            <p:ph type="title"/>
-          </p:nvPr>
-        </p:nvSpPr>
-        <p:spPr>
-          <a:xfrm>
-            <a:off x="457200" y="274638"/>
-            <a:ext cx="8229600" cy="1143000"/>
-          </a:xfrm>
-          <a:prstGeom prst="rect">
-            <a:avLst/>
-          </a:prstGeom>
-          <a:noFill/>
-          <a:ln>
-            <a:noFill/>
-          </a:ln>
-        </p:spPr>
-        <p:txBody>
-          <a:bodyPr anchorCtr="0" anchor="b" bIns="91425" lIns="91425" spcFirstLastPara="1" rIns="91425" wrap="square" tIns="91425">
-            <a:noAutofit/>
-          </a:bodyPr>
-          <a:lstStyle/>
-          <a:p>
-            <a:pPr indent="0" lvl="0" marL="0" rtl="0" algn="l">
-              <a:lnSpc>
-                <a:spcPct val="100000"/>
-              </a:lnSpc>
-              <a:spcBef>
-                <a:spcPts val="0"/>
-              </a:spcBef>
-              <a:spcAft>
-                <a:spcPts val="0"/>
-              </a:spcAft>
-              <a:buSzPts val="3600"/>
-              <a:buNone/>
-            </a:pPr>
-            <a:r>
-              <a:rPr lang="en">
-                <a:solidFill>
-                  <a:srgbClr val="A31415"/>
-                </a:solidFill>
-              </a:rPr>
-              <a:t>Deep Learning</a:t>
-            </a:r>
-            <a:r>
-              <a:rPr lang="en"/>
-              <a:t>: </a:t>
-            </a:r>
-            <a:r>
-              <a:rPr lang="en">
-                <a:solidFill>
-                  <a:srgbClr val="5AABBC"/>
-                </a:solidFill>
-                <a:latin typeface="Consolas"/>
-                <a:ea typeface="Consolas"/>
-                <a:cs typeface="Consolas"/>
-                <a:sym typeface="Consolas"/>
-              </a:rPr>
-              <a:t>Dataset</a:t>
-            </a:r>
-            <a:endParaRPr>
-              <a:solidFill>
-                <a:srgbClr val="5AABBC"/>
-              </a:solidFill>
-              <a:latin typeface="Consolas"/>
-              <a:ea typeface="Consolas"/>
-              <a:cs typeface="Consolas"/>
-              <a:sym typeface="Consolas"/>
-            </a:endParaRPr>
-          </a:p>
-        </p:txBody>
-      </p:sp>
-      <p:sp>
-        <p:nvSpPr>
-          <p:cNvPr id="220" name="Google Shape;220;g3bbeee67e43_0_137"/>
-          <p:cNvSpPr txBox="1"/>
-          <p:nvPr>
-            <p:ph idx="1" type="body"/>
-          </p:nvPr>
-        </p:nvSpPr>
-        <p:spPr>
-          <a:xfrm>
-            <a:off x="457200" y="1600200"/>
-            <a:ext cx="8229600" cy="1728600"/>
-          </a:xfrm>
-          <a:prstGeom prst="rect">
-            <a:avLst/>
-          </a:prstGeom>
-          <a:noFill/>
-          <a:ln>
-            <a:noFill/>
-          </a:ln>
-        </p:spPr>
-        <p:txBody>
-          <a:bodyPr anchorCtr="0" anchor="t" bIns="91425" lIns="91425" spcFirstLastPara="1" rIns="91425" wrap="square" tIns="91425">
-            <a:noAutofit/>
-          </a:bodyPr>
-          <a:lstStyle/>
-          <a:p>
-            <a:pPr indent="0" lvl="0" marL="0" rtl="0" algn="l">
-              <a:lnSpc>
-                <a:spcPct val="100000"/>
-              </a:lnSpc>
-              <a:spcBef>
-                <a:spcPts val="600"/>
-              </a:spcBef>
-              <a:spcAft>
-                <a:spcPts val="0"/>
-              </a:spcAft>
-              <a:buSzPts val="3000"/>
-              <a:buNone/>
-            </a:pPr>
-            <a:r>
-              <a:rPr lang="en"/>
-              <a:t>A </a:t>
-            </a:r>
-            <a:r>
-              <a:rPr b="1" lang="en">
-                <a:solidFill>
-                  <a:srgbClr val="5AABBC"/>
-                </a:solidFill>
-                <a:latin typeface="Consolas"/>
-                <a:ea typeface="Consolas"/>
-                <a:cs typeface="Consolas"/>
-                <a:sym typeface="Consolas"/>
-              </a:rPr>
-              <a:t>dataset </a:t>
-            </a:r>
-            <a:r>
-              <a:rPr lang="en"/>
-              <a:t>is a collection of </a:t>
-            </a:r>
-            <a:r>
-              <a:rPr b="1" lang="en">
-                <a:solidFill>
-                  <a:srgbClr val="5AABBC"/>
-                </a:solidFill>
-                <a:latin typeface="Consolas"/>
-                <a:ea typeface="Consolas"/>
-                <a:cs typeface="Consolas"/>
-                <a:sym typeface="Consolas"/>
-              </a:rPr>
-              <a:t>feature vectors</a:t>
-            </a:r>
-            <a:r>
-              <a:rPr lang="en"/>
-              <a:t> for </a:t>
-            </a:r>
-            <a:r>
-              <a:rPr b="1" lang="en">
-                <a:solidFill>
-                  <a:srgbClr val="5AABBC"/>
-                </a:solidFill>
-                <a:latin typeface="Consolas"/>
-                <a:ea typeface="Consolas"/>
-                <a:cs typeface="Consolas"/>
-                <a:sym typeface="Consolas"/>
-              </a:rPr>
-              <a:t>samples</a:t>
-            </a:r>
-            <a:r>
-              <a:rPr lang="en"/>
-              <a:t> that are </a:t>
-            </a:r>
-            <a:r>
-              <a:rPr b="1" lang="en">
-                <a:solidFill>
-                  <a:srgbClr val="DCB439"/>
-                </a:solidFill>
-              </a:rPr>
-              <a:t>ideally representative of the population</a:t>
-            </a:r>
-            <a:r>
-              <a:rPr lang="en"/>
-              <a:t> we’re interested in</a:t>
-            </a:r>
-            <a:endParaRPr/>
-          </a:p>
-          <a:p>
-            <a:pPr indent="0" lvl="0" marL="0" rtl="0" algn="l">
-              <a:lnSpc>
-                <a:spcPct val="100000"/>
-              </a:lnSpc>
-              <a:spcBef>
-                <a:spcPts val="600"/>
-              </a:spcBef>
-              <a:spcAft>
-                <a:spcPts val="0"/>
-              </a:spcAft>
-              <a:buSzPts val="3000"/>
-              <a:buNone/>
-            </a:pPr>
-            <a:r>
-              <a:t/>
-            </a:r>
-            <a:endParaRPr>
-              <a:solidFill>
-                <a:srgbClr val="5AABBC"/>
-              </a:solidFill>
-              <a:latin typeface="Consolas"/>
-              <a:ea typeface="Consolas"/>
-              <a:cs typeface="Consolas"/>
-              <a:sym typeface="Consolas"/>
-            </a:endParaRPr>
-          </a:p>
-          <a:p>
-            <a:pPr indent="0" lvl="0" marL="0" rtl="0" algn="l">
-              <a:lnSpc>
-                <a:spcPct val="100000"/>
-              </a:lnSpc>
-              <a:spcBef>
-                <a:spcPts val="600"/>
-              </a:spcBef>
-              <a:spcAft>
-                <a:spcPts val="0"/>
-              </a:spcAft>
-              <a:buSzPts val="3000"/>
-              <a:buNone/>
-            </a:pPr>
-            <a:r>
-              <a:t/>
-            </a:r>
-            <a:endParaRPr>
-              <a:solidFill>
-                <a:srgbClr val="5AABBC"/>
-              </a:solidFill>
-              <a:latin typeface="Consolas"/>
-              <a:ea typeface="Consolas"/>
-              <a:cs typeface="Consolas"/>
-              <a:sym typeface="Consolas"/>
-            </a:endParaRPr>
-          </a:p>
-        </p:txBody>
-      </p:sp>
-    </p:spTree>
-  </p:cSld>
-  <p:clrMapOvr>
-    <a:masterClrMapping/>
-  </p:clrMapOvr>
-</p:sld>
-</file>
-
-<file path=ppt/slides/slide21.xml><?xml version="1.0" encoding="utf-8"?>
-<p:sld xmlns:a="http://schemas.openxmlformats.org/drawingml/2006/main" xmlns:r="http://schemas.openxmlformats.org/officeDocument/2006/relationships" xmlns:mc="http://schemas.openxmlformats.org/markup-compatibility/2006" xmlns:mv="urn:schemas-microsoft-com:mac:vml" xmlns:p="http://schemas.openxmlformats.org/presentationml/2006/main" xmlns:c="http://schemas.openxmlformats.org/drawingml/2006/chart" xmlns:dgm="http://schemas.openxmlformats.org/drawingml/2006/diagram" xmlns:o="urn:schemas-microsoft-com:office:office" xmlns:v="urn:schemas-microsoft-com:vml" xmlns:pvml="urn:schemas-microsoft-com:office:powerpoint" xmlns:com="http://schemas.openxmlformats.org/drawingml/2006/compatibility" xmlns:p14="http://schemas.microsoft.com/office/powerpoint/2010/main" xmlns:p15="http://schemas.microsoft.com/office/powerpoint/2012/main" xmlns:ahyp="http://schemas.microsoft.com/office/drawing/2018/hyperlinkcolor">
-  <p:cSld>
-    <p:spTree>
-      <p:nvGrpSpPr>
-        <p:cNvPr id="224" name="Shape 224"/>
-        <p:cNvGrpSpPr/>
-        <p:nvPr/>
-      </p:nvGrpSpPr>
-      <p:grpSpPr>
-        <a:xfrm>
-          <a:off x="0" y="0"/>
-          <a:ext cx="0" cy="0"/>
-          <a:chOff x="0" y="0"/>
-          <a:chExt cx="0" cy="0"/>
-        </a:xfrm>
-      </p:grpSpPr>
-      <p:sp>
-        <p:nvSpPr>
-          <p:cNvPr id="225" name="Google Shape;225;g3bbeee67e43_0_126"/>
-          <p:cNvSpPr txBox="1"/>
-          <p:nvPr>
-            <p:ph type="title"/>
-          </p:nvPr>
-        </p:nvSpPr>
-        <p:spPr>
-          <a:xfrm>
-            <a:off x="457200" y="274638"/>
-            <a:ext cx="8229600" cy="1143000"/>
-          </a:xfrm>
-          <a:prstGeom prst="rect">
-            <a:avLst/>
-          </a:prstGeom>
-          <a:noFill/>
-          <a:ln>
-            <a:noFill/>
-          </a:ln>
-        </p:spPr>
-        <p:txBody>
-          <a:bodyPr anchorCtr="0" anchor="b" bIns="91425" lIns="91425" spcFirstLastPara="1" rIns="91425" wrap="square" tIns="91425">
-            <a:noAutofit/>
-          </a:bodyPr>
-          <a:lstStyle/>
-          <a:p>
-            <a:pPr indent="0" lvl="0" marL="0" rtl="0" algn="l">
-              <a:lnSpc>
-                <a:spcPct val="100000"/>
-              </a:lnSpc>
-              <a:spcBef>
-                <a:spcPts val="0"/>
-              </a:spcBef>
-              <a:spcAft>
-                <a:spcPts val="0"/>
-              </a:spcAft>
-              <a:buSzPts val="3600"/>
-              <a:buNone/>
-            </a:pPr>
-            <a:r>
-              <a:rPr lang="en">
-                <a:solidFill>
-                  <a:srgbClr val="A31415"/>
-                </a:solidFill>
-                <a:latin typeface="Consolas"/>
-                <a:ea typeface="Consolas"/>
-                <a:cs typeface="Consolas"/>
-                <a:sym typeface="Consolas"/>
-              </a:rPr>
-              <a:t>Deep Learning</a:t>
-            </a:r>
-            <a:r>
-              <a:rPr lang="en"/>
-              <a:t>: </a:t>
-            </a:r>
-            <a:r>
-              <a:rPr lang="en">
-                <a:solidFill>
-                  <a:srgbClr val="5AABBC"/>
-                </a:solidFill>
-                <a:latin typeface="Consolas"/>
-                <a:ea typeface="Consolas"/>
-                <a:cs typeface="Consolas"/>
-                <a:sym typeface="Consolas"/>
-              </a:rPr>
-              <a:t>features</a:t>
-            </a:r>
-            <a:endParaRPr>
-              <a:solidFill>
-                <a:srgbClr val="5AABBC"/>
-              </a:solidFill>
-              <a:latin typeface="Consolas"/>
-              <a:ea typeface="Consolas"/>
-              <a:cs typeface="Consolas"/>
-              <a:sym typeface="Consolas"/>
-            </a:endParaRPr>
-          </a:p>
-        </p:txBody>
-      </p:sp>
-      <p:sp>
-        <p:nvSpPr>
-          <p:cNvPr id="226" name="Google Shape;226;g3bbeee67e43_0_126"/>
-          <p:cNvSpPr txBox="1"/>
-          <p:nvPr>
-            <p:ph idx="1" type="body"/>
-          </p:nvPr>
-        </p:nvSpPr>
-        <p:spPr>
-          <a:xfrm>
-            <a:off x="457200" y="1600200"/>
-            <a:ext cx="8229600" cy="4967700"/>
-          </a:xfrm>
-          <a:prstGeom prst="rect">
-            <a:avLst/>
-          </a:prstGeom>
-          <a:noFill/>
-          <a:ln>
-            <a:noFill/>
-          </a:ln>
-        </p:spPr>
-        <p:txBody>
-          <a:bodyPr anchorCtr="0" anchor="t" bIns="91425" lIns="91425" spcFirstLastPara="1" rIns="91425" wrap="square" tIns="91425">
-            <a:noAutofit/>
-          </a:bodyPr>
-          <a:lstStyle/>
-          <a:p>
-            <a:pPr indent="0" lvl="0" marL="0" rtl="0" algn="l">
-              <a:lnSpc>
-                <a:spcPct val="100000"/>
-              </a:lnSpc>
-              <a:spcBef>
-                <a:spcPts val="600"/>
-              </a:spcBef>
-              <a:spcAft>
-                <a:spcPts val="0"/>
-              </a:spcAft>
-              <a:buSzPts val="3000"/>
-              <a:buNone/>
-            </a:pPr>
-            <a:r>
-              <a:rPr lang="en"/>
-              <a:t>In </a:t>
-            </a:r>
-            <a:r>
-              <a:rPr b="1" lang="en">
-                <a:solidFill>
-                  <a:srgbClr val="A31515"/>
-                </a:solidFill>
-              </a:rPr>
-              <a:t>deep learning</a:t>
-            </a:r>
-            <a:r>
-              <a:rPr lang="en"/>
-              <a:t>, a </a:t>
-            </a:r>
-            <a:r>
-              <a:rPr b="1" lang="en">
-                <a:solidFill>
-                  <a:srgbClr val="5AABBC"/>
-                </a:solidFill>
-                <a:latin typeface="Consolas"/>
-                <a:ea typeface="Consolas"/>
-                <a:cs typeface="Consolas"/>
-                <a:sym typeface="Consolas"/>
-              </a:rPr>
-              <a:t>feature</a:t>
-            </a:r>
-            <a:r>
-              <a:rPr lang="en"/>
-              <a:t> is a way to describe a </a:t>
-            </a:r>
-            <a:r>
-              <a:rPr b="1" lang="en">
-                <a:solidFill>
-                  <a:srgbClr val="5AABBC"/>
-                </a:solidFill>
-                <a:latin typeface="Consolas"/>
-                <a:ea typeface="Consolas"/>
-                <a:cs typeface="Consolas"/>
-                <a:sym typeface="Consolas"/>
-              </a:rPr>
-              <a:t>sample</a:t>
-            </a:r>
-            <a:endParaRPr b="1">
-              <a:solidFill>
-                <a:srgbClr val="5AABBC"/>
-              </a:solidFill>
-              <a:latin typeface="Consolas"/>
-              <a:ea typeface="Consolas"/>
-              <a:cs typeface="Consolas"/>
-              <a:sym typeface="Consolas"/>
-            </a:endParaRPr>
-          </a:p>
-          <a:p>
-            <a:pPr indent="0" lvl="0" marL="0" rtl="0" algn="l">
-              <a:lnSpc>
-                <a:spcPct val="100000"/>
-              </a:lnSpc>
-              <a:spcBef>
-                <a:spcPts val="600"/>
-              </a:spcBef>
-              <a:spcAft>
-                <a:spcPts val="0"/>
-              </a:spcAft>
-              <a:buSzPts val="3000"/>
-              <a:buNone/>
-            </a:pPr>
-            <a:r>
-              <a:t/>
-            </a:r>
-            <a:endParaRPr>
-              <a:solidFill>
-                <a:srgbClr val="5AABBC"/>
-              </a:solidFill>
-              <a:latin typeface="Consolas"/>
-              <a:ea typeface="Consolas"/>
-              <a:cs typeface="Consolas"/>
-              <a:sym typeface="Consolas"/>
-            </a:endParaRPr>
-          </a:p>
-          <a:p>
-            <a:pPr indent="0" lvl="0" marL="0" rtl="0" algn="l">
-              <a:lnSpc>
-                <a:spcPct val="100000"/>
-              </a:lnSpc>
-              <a:spcBef>
-                <a:spcPts val="600"/>
-              </a:spcBef>
-              <a:spcAft>
-                <a:spcPts val="0"/>
-              </a:spcAft>
-              <a:buSzPts val="3000"/>
-              <a:buNone/>
-            </a:pPr>
-            <a:r>
-              <a:rPr lang="en"/>
-              <a:t>A </a:t>
-            </a:r>
-            <a:r>
-              <a:rPr b="1" lang="en">
-                <a:solidFill>
-                  <a:srgbClr val="5AABBC"/>
-                </a:solidFill>
-                <a:latin typeface="Consolas"/>
-                <a:ea typeface="Consolas"/>
-                <a:cs typeface="Consolas"/>
-                <a:sym typeface="Consolas"/>
-              </a:rPr>
-              <a:t>sample</a:t>
-            </a:r>
-            <a:r>
-              <a:rPr lang="en"/>
-              <a:t> is one individual “thing” in our dataset. Maybe a bird, a flower, or a person.</a:t>
-            </a:r>
-            <a:endParaRPr/>
-          </a:p>
-        </p:txBody>
-      </p:sp>
-    </p:spTree>
-  </p:cSld>
-  <p:clrMapOvr>
-    <a:masterClrMapping/>
-  </p:clrMapOvr>
-</p:sld>
-</file>
-
-<file path=ppt/slides/slide22.xml><?xml version="1.0" encoding="utf-8"?>
-<p:sld xmlns:a="http://schemas.openxmlformats.org/drawingml/2006/main" xmlns:r="http://schemas.openxmlformats.org/officeDocument/2006/relationships" xmlns:mc="http://schemas.openxmlformats.org/markup-compatibility/2006" xmlns:mv="urn:schemas-microsoft-com:mac:vml" xmlns:p="http://schemas.openxmlformats.org/presentationml/2006/main" xmlns:c="http://schemas.openxmlformats.org/drawingml/2006/chart" xmlns:dgm="http://schemas.openxmlformats.org/drawingml/2006/diagram" xmlns:o="urn:schemas-microsoft-com:office:office" xmlns:v="urn:schemas-microsoft-com:vml" xmlns:pvml="urn:schemas-microsoft-com:office:powerpoint" xmlns:com="http://schemas.openxmlformats.org/drawingml/2006/compatibility" xmlns:p14="http://schemas.microsoft.com/office/powerpoint/2010/main" xmlns:p15="http://schemas.microsoft.com/office/powerpoint/2012/main" xmlns:ahyp="http://schemas.microsoft.com/office/drawing/2018/hyperlinkcolor">
-  <p:cSld>
-    <p:spTree>
-      <p:nvGrpSpPr>
-        <p:cNvPr id="230" name="Shape 230"/>
-        <p:cNvGrpSpPr/>
-        <p:nvPr/>
-      </p:nvGrpSpPr>
-      <p:grpSpPr>
-        <a:xfrm>
-          <a:off x="0" y="0"/>
-          <a:ext cx="0" cy="0"/>
-          <a:chOff x="0" y="0"/>
-          <a:chExt cx="0" cy="0"/>
-        </a:xfrm>
-      </p:grpSpPr>
-      <p:sp>
-        <p:nvSpPr>
-          <p:cNvPr id="231" name="Google Shape;231;g3bbeee67e43_0_132"/>
-          <p:cNvSpPr txBox="1"/>
-          <p:nvPr>
-            <p:ph type="title"/>
-          </p:nvPr>
-        </p:nvSpPr>
-        <p:spPr>
-          <a:xfrm>
-            <a:off x="457200" y="274638"/>
-            <a:ext cx="8229600" cy="1143000"/>
-          </a:xfrm>
-          <a:prstGeom prst="rect">
-            <a:avLst/>
-          </a:prstGeom>
-          <a:noFill/>
-          <a:ln>
-            <a:noFill/>
-          </a:ln>
-        </p:spPr>
-        <p:txBody>
-          <a:bodyPr anchorCtr="0" anchor="b" bIns="91425" lIns="91425" spcFirstLastPara="1" rIns="91425" wrap="square" tIns="91425">
-            <a:noAutofit/>
-          </a:bodyPr>
-          <a:lstStyle/>
-          <a:p>
-            <a:pPr indent="0" lvl="0" marL="0" rtl="0" algn="l">
-              <a:lnSpc>
-                <a:spcPct val="100000"/>
-              </a:lnSpc>
-              <a:spcBef>
-                <a:spcPts val="0"/>
-              </a:spcBef>
-              <a:spcAft>
-                <a:spcPts val="0"/>
-              </a:spcAft>
-              <a:buSzPts val="3600"/>
-              <a:buNone/>
-            </a:pPr>
-            <a:r>
-              <a:rPr lang="en">
-                <a:solidFill>
-                  <a:srgbClr val="A31415"/>
-                </a:solidFill>
-              </a:rPr>
-              <a:t>Deep Learning</a:t>
-            </a:r>
-            <a:r>
-              <a:rPr lang="en"/>
-              <a:t>: </a:t>
-            </a:r>
-            <a:r>
-              <a:rPr lang="en">
-                <a:solidFill>
-                  <a:srgbClr val="5AABBC"/>
-                </a:solidFill>
-                <a:latin typeface="Consolas"/>
-                <a:ea typeface="Consolas"/>
-                <a:cs typeface="Consolas"/>
-                <a:sym typeface="Consolas"/>
-              </a:rPr>
-              <a:t>feature vector</a:t>
-            </a:r>
-            <a:endParaRPr>
-              <a:solidFill>
-                <a:srgbClr val="5AABBC"/>
-              </a:solidFill>
-              <a:latin typeface="Consolas"/>
-              <a:ea typeface="Consolas"/>
-              <a:cs typeface="Consolas"/>
-              <a:sym typeface="Consolas"/>
-            </a:endParaRPr>
-          </a:p>
-        </p:txBody>
-      </p:sp>
-      <p:sp>
-        <p:nvSpPr>
-          <p:cNvPr id="232" name="Google Shape;232;g3bbeee67e43_0_132"/>
-          <p:cNvSpPr txBox="1"/>
-          <p:nvPr>
-            <p:ph idx="1" type="body"/>
-          </p:nvPr>
-        </p:nvSpPr>
-        <p:spPr>
-          <a:xfrm>
-            <a:off x="457200" y="1600200"/>
-            <a:ext cx="8229600" cy="4967700"/>
-          </a:xfrm>
-          <a:prstGeom prst="rect">
-            <a:avLst/>
-          </a:prstGeom>
-          <a:noFill/>
-          <a:ln>
-            <a:noFill/>
-          </a:ln>
-        </p:spPr>
-        <p:txBody>
-          <a:bodyPr anchorCtr="0" anchor="t" bIns="91425" lIns="91425" spcFirstLastPara="1" rIns="91425" wrap="square" tIns="91425">
-            <a:noAutofit/>
-          </a:bodyPr>
-          <a:lstStyle/>
-          <a:p>
-            <a:pPr indent="0" lvl="0" marL="0" rtl="0" algn="l">
-              <a:lnSpc>
-                <a:spcPct val="100000"/>
-              </a:lnSpc>
-              <a:spcBef>
-                <a:spcPts val="600"/>
-              </a:spcBef>
-              <a:spcAft>
-                <a:spcPts val="0"/>
-              </a:spcAft>
-              <a:buSzPts val="3000"/>
-              <a:buNone/>
-            </a:pPr>
-            <a:r>
-              <a:rPr lang="en"/>
-              <a:t>A </a:t>
-            </a:r>
-            <a:r>
-              <a:rPr b="1" lang="en">
-                <a:solidFill>
-                  <a:srgbClr val="5AABBC"/>
-                </a:solidFill>
-                <a:latin typeface="Consolas"/>
-                <a:ea typeface="Consolas"/>
-                <a:cs typeface="Consolas"/>
-                <a:sym typeface="Consolas"/>
-              </a:rPr>
-              <a:t>feature vector</a:t>
-            </a:r>
-            <a:r>
-              <a:rPr lang="en"/>
-              <a:t> then is a representation of a </a:t>
-            </a:r>
-            <a:r>
-              <a:rPr b="1" lang="en">
-                <a:solidFill>
-                  <a:srgbClr val="5AABBC"/>
-                </a:solidFill>
-                <a:latin typeface="Consolas"/>
-                <a:ea typeface="Consolas"/>
-                <a:cs typeface="Consolas"/>
-                <a:sym typeface="Consolas"/>
-              </a:rPr>
-              <a:t>sample </a:t>
-            </a:r>
-            <a:r>
-              <a:rPr lang="en"/>
-              <a:t>in some high-dimensional space</a:t>
-            </a:r>
-            <a:endParaRPr/>
-          </a:p>
-          <a:p>
-            <a:pPr indent="0" lvl="0" marL="0" rtl="0" algn="l">
-              <a:lnSpc>
-                <a:spcPct val="100000"/>
-              </a:lnSpc>
-              <a:spcBef>
-                <a:spcPts val="600"/>
-              </a:spcBef>
-              <a:spcAft>
-                <a:spcPts val="0"/>
-              </a:spcAft>
-              <a:buSzPts val="3000"/>
-              <a:buNone/>
-            </a:pPr>
-            <a:r>
-              <a:t/>
-            </a:r>
-            <a:endParaRPr>
-              <a:solidFill>
-                <a:srgbClr val="5AABBC"/>
-              </a:solidFill>
-              <a:latin typeface="Consolas"/>
-              <a:ea typeface="Consolas"/>
-              <a:cs typeface="Consolas"/>
-              <a:sym typeface="Consolas"/>
-            </a:endParaRPr>
-          </a:p>
-          <a:p>
-            <a:pPr indent="0" lvl="0" marL="0" rtl="0" algn="l">
-              <a:lnSpc>
-                <a:spcPct val="100000"/>
-              </a:lnSpc>
-              <a:spcBef>
-                <a:spcPts val="600"/>
-              </a:spcBef>
-              <a:spcAft>
-                <a:spcPts val="0"/>
-              </a:spcAft>
-              <a:buSzPts val="3000"/>
-              <a:buNone/>
-            </a:pPr>
-            <a:r>
-              <a:t/>
-            </a:r>
-            <a:endParaRPr>
-              <a:solidFill>
-                <a:srgbClr val="5AABBC"/>
-              </a:solidFill>
-              <a:latin typeface="Consolas"/>
-              <a:ea typeface="Consolas"/>
-              <a:cs typeface="Consolas"/>
-              <a:sym typeface="Consolas"/>
-            </a:endParaRPr>
-          </a:p>
-        </p:txBody>
-      </p:sp>
-    </p:spTree>
-  </p:cSld>
-  <p:clrMapOvr>
-    <a:masterClrMapping/>
-  </p:clrMapOvr>
-</p:sld>
-</file>
-
-<file path=ppt/slides/slide23.xml><?xml version="1.0" encoding="utf-8"?>
-<p:sld xmlns:a="http://schemas.openxmlformats.org/drawingml/2006/main" xmlns:r="http://schemas.openxmlformats.org/officeDocument/2006/relationships" xmlns:mc="http://schemas.openxmlformats.org/markup-compatibility/2006" xmlns:mv="urn:schemas-microsoft-com:mac:vml" xmlns:p="http://schemas.openxmlformats.org/presentationml/2006/main" xmlns:c="http://schemas.openxmlformats.org/drawingml/2006/chart" xmlns:dgm="http://schemas.openxmlformats.org/drawingml/2006/diagram" xmlns:o="urn:schemas-microsoft-com:office:office" xmlns:v="urn:schemas-microsoft-com:vml" xmlns:pvml="urn:schemas-microsoft-com:office:powerpoint" xmlns:com="http://schemas.openxmlformats.org/drawingml/2006/compatibility" xmlns:p14="http://schemas.microsoft.com/office/powerpoint/2010/main" xmlns:p15="http://schemas.microsoft.com/office/powerpoint/2012/main" xmlns:ahyp="http://schemas.microsoft.com/office/drawing/2018/hyperlinkcolor">
-  <p:cSld>
-    <p:spTree>
-      <p:nvGrpSpPr>
-        <p:cNvPr id="236" name="Shape 236"/>
-        <p:cNvGrpSpPr/>
-        <p:nvPr/>
-      </p:nvGrpSpPr>
-      <p:grpSpPr>
-        <a:xfrm>
-          <a:off x="0" y="0"/>
-          <a:ext cx="0" cy="0"/>
-          <a:chOff x="0" y="0"/>
-          <a:chExt cx="0" cy="0"/>
-        </a:xfrm>
-      </p:grpSpPr>
-      <p:sp>
-        <p:nvSpPr>
-          <p:cNvPr id="237" name="Google Shape;237;g3bbeee67e43_0_147"/>
-          <p:cNvSpPr txBox="1"/>
-          <p:nvPr>
-            <p:ph type="title"/>
-          </p:nvPr>
-        </p:nvSpPr>
-        <p:spPr>
-          <a:xfrm>
-            <a:off x="457200" y="274638"/>
-            <a:ext cx="8229600" cy="1143000"/>
-          </a:xfrm>
-          <a:prstGeom prst="rect">
-            <a:avLst/>
-          </a:prstGeom>
-          <a:noFill/>
-          <a:ln>
-            <a:noFill/>
-          </a:ln>
-        </p:spPr>
-        <p:txBody>
-          <a:bodyPr anchorCtr="0" anchor="b" bIns="91425" lIns="91425" spcFirstLastPara="1" rIns="91425" wrap="square" tIns="91425">
-            <a:noAutofit/>
-          </a:bodyPr>
-          <a:lstStyle/>
-          <a:p>
-            <a:pPr indent="0" lvl="0" marL="0" rtl="0" algn="l">
-              <a:lnSpc>
-                <a:spcPct val="100000"/>
-              </a:lnSpc>
-              <a:spcBef>
-                <a:spcPts val="0"/>
-              </a:spcBef>
-              <a:spcAft>
-                <a:spcPts val="0"/>
-              </a:spcAft>
-              <a:buSzPts val="3600"/>
-              <a:buNone/>
-            </a:pPr>
-            <a:r>
-              <a:rPr lang="en">
-                <a:solidFill>
-                  <a:srgbClr val="A31415"/>
-                </a:solidFill>
-              </a:rPr>
-              <a:t>Machine</a:t>
-            </a:r>
-            <a:r>
-              <a:rPr lang="en">
-                <a:solidFill>
-                  <a:srgbClr val="A31415"/>
-                </a:solidFill>
-              </a:rPr>
-              <a:t> Learning</a:t>
-            </a:r>
-            <a:r>
-              <a:rPr lang="en"/>
-              <a:t>: </a:t>
-            </a:r>
-            <a:r>
-              <a:rPr lang="en">
-                <a:solidFill>
-                  <a:srgbClr val="5AABBC"/>
-                </a:solidFill>
-                <a:latin typeface="Consolas"/>
-                <a:ea typeface="Consolas"/>
-                <a:cs typeface="Consolas"/>
-                <a:sym typeface="Consolas"/>
-              </a:rPr>
-              <a:t>Classification</a:t>
-            </a:r>
-            <a:endParaRPr>
-              <a:solidFill>
-                <a:srgbClr val="5AABBC"/>
-              </a:solidFill>
-              <a:latin typeface="Consolas"/>
-              <a:ea typeface="Consolas"/>
-              <a:cs typeface="Consolas"/>
-              <a:sym typeface="Consolas"/>
-            </a:endParaRPr>
-          </a:p>
-        </p:txBody>
-      </p:sp>
-      <p:sp>
-        <p:nvSpPr>
-          <p:cNvPr id="238" name="Google Shape;238;g3bbeee67e43_0_147"/>
-          <p:cNvSpPr txBox="1"/>
-          <p:nvPr>
-            <p:ph idx="1" type="body"/>
-          </p:nvPr>
-        </p:nvSpPr>
-        <p:spPr>
-          <a:xfrm>
-            <a:off x="457200" y="1600200"/>
-            <a:ext cx="8229600" cy="4788300"/>
-          </a:xfrm>
-          <a:prstGeom prst="rect">
-            <a:avLst/>
-          </a:prstGeom>
-          <a:noFill/>
-          <a:ln>
-            <a:noFill/>
-          </a:ln>
-        </p:spPr>
-        <p:txBody>
-          <a:bodyPr anchorCtr="0" anchor="t" bIns="91425" lIns="91425" spcFirstLastPara="1" rIns="91425" wrap="square" tIns="91425">
-            <a:noAutofit/>
-          </a:bodyPr>
-          <a:lstStyle/>
-          <a:p>
-            <a:pPr indent="0" lvl="0" marL="0" rtl="0" algn="l">
-              <a:lnSpc>
-                <a:spcPct val="100000"/>
-              </a:lnSpc>
-              <a:spcBef>
-                <a:spcPts val="600"/>
-              </a:spcBef>
-              <a:spcAft>
-                <a:spcPts val="0"/>
-              </a:spcAft>
-              <a:buSzPts val="3000"/>
-              <a:buNone/>
-            </a:pPr>
-            <a:r>
-              <a:rPr lang="en"/>
-              <a:t>In </a:t>
-            </a:r>
-            <a:r>
-              <a:rPr b="1" lang="en">
-                <a:solidFill>
-                  <a:srgbClr val="A31515"/>
-                </a:solidFill>
-              </a:rPr>
-              <a:t>machine learning</a:t>
-            </a:r>
-            <a:r>
-              <a:rPr lang="en"/>
-              <a:t>, a </a:t>
-            </a:r>
-            <a:r>
-              <a:rPr b="1" lang="en">
-                <a:solidFill>
-                  <a:srgbClr val="5AABBC"/>
-                </a:solidFill>
-                <a:latin typeface="Consolas"/>
-                <a:ea typeface="Consolas"/>
-                <a:cs typeface="Consolas"/>
-                <a:sym typeface="Consolas"/>
-              </a:rPr>
-              <a:t>classification</a:t>
-            </a:r>
-            <a:r>
-              <a:rPr b="1" lang="en"/>
-              <a:t> </a:t>
-            </a:r>
-            <a:r>
-              <a:rPr lang="en"/>
-              <a:t>task</a:t>
-            </a:r>
-            <a:r>
-              <a:rPr lang="en"/>
-              <a:t> is one in which we’re </a:t>
-            </a:r>
-            <a:r>
-              <a:rPr lang="en"/>
-              <a:t>trying</a:t>
-            </a:r>
-            <a:r>
-              <a:rPr lang="en"/>
-              <a:t> to </a:t>
-            </a:r>
-            <a:r>
-              <a:rPr b="1" lang="en">
-                <a:solidFill>
-                  <a:srgbClr val="465510"/>
-                </a:solidFill>
-              </a:rPr>
-              <a:t>predict a category or label</a:t>
-            </a:r>
-            <a:r>
-              <a:rPr lang="en"/>
-              <a:t> given a </a:t>
-            </a:r>
-            <a:r>
-              <a:rPr b="1" lang="en">
-                <a:solidFill>
-                  <a:srgbClr val="5AABBC"/>
-                </a:solidFill>
-                <a:latin typeface="Consolas"/>
-                <a:ea typeface="Consolas"/>
-                <a:cs typeface="Consolas"/>
-                <a:sym typeface="Consolas"/>
-              </a:rPr>
-              <a:t>sample</a:t>
-            </a:r>
-            <a:r>
-              <a:rPr lang="en"/>
-              <a:t>.</a:t>
-            </a:r>
-            <a:endParaRPr/>
-          </a:p>
-          <a:p>
-            <a:pPr indent="0" lvl="0" marL="0" rtl="0" algn="l">
-              <a:lnSpc>
-                <a:spcPct val="100000"/>
-              </a:lnSpc>
-              <a:spcBef>
-                <a:spcPts val="600"/>
-              </a:spcBef>
-              <a:spcAft>
-                <a:spcPts val="0"/>
-              </a:spcAft>
-              <a:buSzPts val="3000"/>
-              <a:buNone/>
-            </a:pPr>
-            <a:r>
-              <a:t/>
-            </a:r>
-            <a:endParaRPr/>
-          </a:p>
-          <a:p>
-            <a:pPr indent="0" lvl="0" marL="0" rtl="0" algn="l">
-              <a:lnSpc>
-                <a:spcPct val="100000"/>
-              </a:lnSpc>
-              <a:spcBef>
-                <a:spcPts val="600"/>
-              </a:spcBef>
-              <a:spcAft>
-                <a:spcPts val="0"/>
-              </a:spcAft>
-              <a:buSzPts val="3000"/>
-              <a:buNone/>
-            </a:pPr>
-            <a:r>
-              <a:t/>
-            </a:r>
-            <a:endParaRPr/>
-          </a:p>
-          <a:p>
-            <a:pPr indent="0" lvl="0" marL="0" rtl="0" algn="l">
-              <a:lnSpc>
-                <a:spcPct val="100000"/>
-              </a:lnSpc>
-              <a:spcBef>
-                <a:spcPts val="600"/>
-              </a:spcBef>
-              <a:spcAft>
-                <a:spcPts val="0"/>
-              </a:spcAft>
-              <a:buSzPts val="3000"/>
-              <a:buNone/>
-            </a:pPr>
-            <a:r>
-              <a:t/>
-            </a:r>
-            <a:endParaRPr/>
-          </a:p>
-          <a:p>
-            <a:pPr indent="0" lvl="0" marL="0" rtl="0" algn="l">
-              <a:lnSpc>
-                <a:spcPct val="100000"/>
-              </a:lnSpc>
-              <a:spcBef>
-                <a:spcPts val="600"/>
-              </a:spcBef>
-              <a:spcAft>
-                <a:spcPts val="0"/>
-              </a:spcAft>
-              <a:buSzPts val="3000"/>
-              <a:buNone/>
-            </a:pPr>
-            <a:r>
-              <a:t/>
-            </a:r>
-            <a:endParaRPr/>
-          </a:p>
-          <a:p>
-            <a:pPr indent="0" lvl="0" marL="0" rtl="0" algn="l">
-              <a:lnSpc>
-                <a:spcPct val="100000"/>
-              </a:lnSpc>
-              <a:spcBef>
-                <a:spcPts val="600"/>
-              </a:spcBef>
-              <a:spcAft>
-                <a:spcPts val="0"/>
-              </a:spcAft>
-              <a:buSzPts val="3000"/>
-              <a:buNone/>
-            </a:pPr>
-            <a:r>
-              <a:rPr lang="en"/>
-              <a:t>For our student </a:t>
-            </a:r>
-            <a:r>
-              <a:rPr b="1" lang="en">
-                <a:solidFill>
-                  <a:srgbClr val="5AABBC"/>
-                </a:solidFill>
-                <a:latin typeface="Consolas"/>
-                <a:ea typeface="Consolas"/>
-                <a:cs typeface="Consolas"/>
-                <a:sym typeface="Consolas"/>
-              </a:rPr>
-              <a:t>dataset</a:t>
-            </a:r>
-            <a:r>
-              <a:rPr lang="en"/>
-              <a:t>, our categories are: </a:t>
-            </a:r>
-            <a:r>
-              <a:rPr b="1" lang="en">
-                <a:solidFill>
-                  <a:srgbClr val="DCB439"/>
-                </a:solidFill>
-              </a:rPr>
-              <a:t>“Will Graduate”</a:t>
-            </a:r>
-            <a:r>
-              <a:rPr lang="en"/>
-              <a:t> and </a:t>
-            </a:r>
-            <a:r>
-              <a:rPr b="1" lang="en">
-                <a:solidFill>
-                  <a:srgbClr val="DCB439"/>
-                </a:solidFill>
-              </a:rPr>
-              <a:t>“Will not graduate”</a:t>
-            </a:r>
-            <a:endParaRPr b="1">
-              <a:solidFill>
-                <a:srgbClr val="DCB439"/>
-              </a:solidFill>
-            </a:endParaRPr>
-          </a:p>
-          <a:p>
-            <a:pPr indent="0" lvl="0" marL="0" rtl="0" algn="l">
-              <a:lnSpc>
-                <a:spcPct val="100000"/>
-              </a:lnSpc>
-              <a:spcBef>
-                <a:spcPts val="600"/>
-              </a:spcBef>
-              <a:spcAft>
-                <a:spcPts val="0"/>
-              </a:spcAft>
-              <a:buSzPts val="3000"/>
-              <a:buNone/>
-            </a:pPr>
-            <a:r>
-              <a:t/>
-            </a:r>
-            <a:endParaRPr>
-              <a:solidFill>
-                <a:srgbClr val="5AABBC"/>
-              </a:solidFill>
-              <a:latin typeface="Consolas"/>
-              <a:ea typeface="Consolas"/>
-              <a:cs typeface="Consolas"/>
-              <a:sym typeface="Consolas"/>
-            </a:endParaRPr>
-          </a:p>
-        </p:txBody>
-      </p:sp>
-    </p:spTree>
-  </p:cSld>
-  <p:clrMapOvr>
-    <a:masterClrMapping/>
-  </p:clrMapOvr>
-</p:sld>
-</file>
-
-<file path=ppt/slides/slide24.xml><?xml version="1.0" encoding="utf-8"?>
-<p:sld xmlns:a="http://schemas.openxmlformats.org/drawingml/2006/main" xmlns:r="http://schemas.openxmlformats.org/officeDocument/2006/relationships" xmlns:mc="http://schemas.openxmlformats.org/markup-compatibility/2006" xmlns:mv="urn:schemas-microsoft-com:mac:vml" xmlns:p="http://schemas.openxmlformats.org/presentationml/2006/main" xmlns:c="http://schemas.openxmlformats.org/drawingml/2006/chart" xmlns:dgm="http://schemas.openxmlformats.org/drawingml/2006/diagram" xmlns:o="urn:schemas-microsoft-com:office:office" xmlns:v="urn:schemas-microsoft-com:vml" xmlns:pvml="urn:schemas-microsoft-com:office:powerpoint" xmlns:com="http://schemas.openxmlformats.org/drawingml/2006/compatibility" xmlns:p14="http://schemas.microsoft.com/office/powerpoint/2010/main" xmlns:p15="http://schemas.microsoft.com/office/powerpoint/2012/main" xmlns:ahyp="http://schemas.microsoft.com/office/drawing/2018/hyperlinkcolor">
-  <p:cSld>
-    <p:spTree>
-      <p:nvGrpSpPr>
-        <p:cNvPr id="242" name="Shape 242"/>
-        <p:cNvGrpSpPr/>
-        <p:nvPr/>
-      </p:nvGrpSpPr>
-      <p:grpSpPr>
-        <a:xfrm>
-          <a:off x="0" y="0"/>
-          <a:ext cx="0" cy="0"/>
-          <a:chOff x="0" y="0"/>
-          <a:chExt cx="0" cy="0"/>
-        </a:xfrm>
-      </p:grpSpPr>
-      <p:sp>
-        <p:nvSpPr>
-          <p:cNvPr id="243" name="Google Shape;243;g3bbeee67e43_0_142"/>
-          <p:cNvSpPr txBox="1"/>
-          <p:nvPr>
-            <p:ph type="title"/>
-          </p:nvPr>
-        </p:nvSpPr>
-        <p:spPr>
-          <a:xfrm>
-            <a:off x="457200" y="274638"/>
-            <a:ext cx="8229600" cy="1143000"/>
-          </a:xfrm>
-          <a:prstGeom prst="rect">
-            <a:avLst/>
-          </a:prstGeom>
-          <a:noFill/>
-          <a:ln>
-            <a:noFill/>
-          </a:ln>
-        </p:spPr>
-        <p:txBody>
-          <a:bodyPr anchorCtr="0" anchor="b" bIns="91425" lIns="91425" spcFirstLastPara="1" rIns="91425" wrap="square" tIns="91425">
-            <a:noAutofit/>
-          </a:bodyPr>
-          <a:lstStyle/>
-          <a:p>
-            <a:pPr indent="0" lvl="0" marL="0" rtl="0" algn="l">
-              <a:lnSpc>
-                <a:spcPct val="100000"/>
-              </a:lnSpc>
-              <a:spcBef>
-                <a:spcPts val="0"/>
-              </a:spcBef>
-              <a:spcAft>
-                <a:spcPts val="0"/>
-              </a:spcAft>
-              <a:buSzPts val="3600"/>
-              <a:buNone/>
-            </a:pPr>
-            <a:r>
-              <a:rPr lang="en">
-                <a:solidFill>
-                  <a:srgbClr val="A31415"/>
-                </a:solidFill>
-              </a:rPr>
-              <a:t>Machine</a:t>
-            </a:r>
-            <a:r>
-              <a:rPr lang="en">
-                <a:solidFill>
-                  <a:srgbClr val="A31415"/>
-                </a:solidFill>
-              </a:rPr>
-              <a:t> Learning</a:t>
-            </a:r>
-            <a:r>
-              <a:rPr lang="en"/>
-              <a:t>: </a:t>
-            </a:r>
-            <a:r>
-              <a:rPr lang="en">
-                <a:solidFill>
-                  <a:srgbClr val="5AABBC"/>
-                </a:solidFill>
-                <a:latin typeface="Consolas"/>
-                <a:ea typeface="Consolas"/>
-                <a:cs typeface="Consolas"/>
-                <a:sym typeface="Consolas"/>
-              </a:rPr>
-              <a:t>Supervised Learning</a:t>
-            </a:r>
-            <a:endParaRPr>
-              <a:solidFill>
-                <a:srgbClr val="5AABBC"/>
-              </a:solidFill>
-              <a:latin typeface="Consolas"/>
-              <a:ea typeface="Consolas"/>
-              <a:cs typeface="Consolas"/>
-              <a:sym typeface="Consolas"/>
-            </a:endParaRPr>
-          </a:p>
-        </p:txBody>
-      </p:sp>
-      <p:sp>
-        <p:nvSpPr>
-          <p:cNvPr id="244" name="Google Shape;244;g3bbeee67e43_0_142"/>
-          <p:cNvSpPr txBox="1"/>
-          <p:nvPr>
-            <p:ph idx="1" type="body"/>
-          </p:nvPr>
-        </p:nvSpPr>
-        <p:spPr>
-          <a:xfrm>
-            <a:off x="457200" y="1600200"/>
-            <a:ext cx="8229600" cy="2440800"/>
-          </a:xfrm>
-          <a:prstGeom prst="rect">
-            <a:avLst/>
-          </a:prstGeom>
-          <a:noFill/>
-          <a:ln>
-            <a:noFill/>
-          </a:ln>
-        </p:spPr>
-        <p:txBody>
-          <a:bodyPr anchorCtr="0" anchor="t" bIns="91425" lIns="91425" spcFirstLastPara="1" rIns="91425" wrap="square" tIns="91425">
-            <a:noAutofit/>
-          </a:bodyPr>
-          <a:lstStyle/>
-          <a:p>
-            <a:pPr indent="0" lvl="0" marL="0" rtl="0" algn="l">
-              <a:lnSpc>
-                <a:spcPct val="100000"/>
-              </a:lnSpc>
-              <a:spcBef>
-                <a:spcPts val="600"/>
-              </a:spcBef>
-              <a:spcAft>
-                <a:spcPts val="0"/>
-              </a:spcAft>
-              <a:buSzPts val="3000"/>
-              <a:buNone/>
-            </a:pPr>
-            <a:r>
-              <a:rPr lang="en"/>
-              <a:t>We call it </a:t>
-            </a:r>
-            <a:r>
-              <a:rPr b="1" lang="en">
-                <a:solidFill>
-                  <a:srgbClr val="5AABBC"/>
-                </a:solidFill>
-                <a:latin typeface="Consolas"/>
-                <a:ea typeface="Consolas"/>
-                <a:cs typeface="Consolas"/>
-                <a:sym typeface="Consolas"/>
-              </a:rPr>
-              <a:t>supervised learning</a:t>
-            </a:r>
-            <a:r>
-              <a:rPr lang="en"/>
-              <a:t> when we have examples of the correct answer in our </a:t>
-            </a:r>
-            <a:r>
-              <a:rPr b="1" lang="en">
-                <a:solidFill>
-                  <a:srgbClr val="5AABBC"/>
-                </a:solidFill>
-                <a:latin typeface="Consolas"/>
-                <a:ea typeface="Consolas"/>
-                <a:cs typeface="Consolas"/>
-                <a:sym typeface="Consolas"/>
-              </a:rPr>
-              <a:t>dataset</a:t>
-            </a:r>
-            <a:r>
-              <a:rPr lang="en"/>
-              <a:t>, because </a:t>
-            </a:r>
-            <a:r>
-              <a:rPr b="1" lang="en">
-                <a:solidFill>
-                  <a:srgbClr val="465510"/>
-                </a:solidFill>
-              </a:rPr>
-              <a:t>we can tell our model if it guessed correctly or not</a:t>
-            </a:r>
-            <a:r>
-              <a:rPr lang="en"/>
-              <a:t>. We call these correct answers </a:t>
-            </a:r>
-            <a:r>
-              <a:rPr b="1" lang="en">
-                <a:solidFill>
-                  <a:srgbClr val="5AABBC"/>
-                </a:solidFill>
-                <a:latin typeface="Consolas"/>
-                <a:ea typeface="Consolas"/>
-                <a:cs typeface="Consolas"/>
-                <a:sym typeface="Consolas"/>
-              </a:rPr>
-              <a:t>ground truth</a:t>
-            </a:r>
-            <a:endParaRPr b="1">
-              <a:solidFill>
-                <a:srgbClr val="5AABBC"/>
-              </a:solidFill>
-              <a:latin typeface="Consolas"/>
-              <a:ea typeface="Consolas"/>
-              <a:cs typeface="Consolas"/>
-              <a:sym typeface="Consolas"/>
-            </a:endParaRPr>
-          </a:p>
-          <a:p>
-            <a:pPr indent="0" lvl="0" marL="0" rtl="0" algn="l">
-              <a:lnSpc>
-                <a:spcPct val="100000"/>
-              </a:lnSpc>
-              <a:spcBef>
-                <a:spcPts val="600"/>
-              </a:spcBef>
-              <a:spcAft>
-                <a:spcPts val="0"/>
-              </a:spcAft>
-              <a:buSzPts val="3000"/>
-              <a:buNone/>
-            </a:pPr>
-            <a:r>
-              <a:t/>
-            </a:r>
-            <a:endParaRPr>
-              <a:solidFill>
-                <a:srgbClr val="5AABBC"/>
-              </a:solidFill>
-              <a:latin typeface="Consolas"/>
-              <a:ea typeface="Consolas"/>
-              <a:cs typeface="Consolas"/>
-              <a:sym typeface="Consolas"/>
-            </a:endParaRPr>
-          </a:p>
-        </p:txBody>
-      </p:sp>
-    </p:spTree>
-  </p:cSld>
-  <p:clrMapOvr>
-    <a:masterClrMapping/>
-  </p:clrMapOvr>
-</p:sld>
-</file>
-
-<file path=ppt/slides/slide25.xml><?xml version="1.0" encoding="utf-8"?>
-<p:sld xmlns:a="http://schemas.openxmlformats.org/drawingml/2006/main" xmlns:r="http://schemas.openxmlformats.org/officeDocument/2006/relationships" xmlns:mc="http://schemas.openxmlformats.org/markup-compatibility/2006" xmlns:mv="urn:schemas-microsoft-com:mac:vml" xmlns:p="http://schemas.openxmlformats.org/presentationml/2006/main" xmlns:c="http://schemas.openxmlformats.org/drawingml/2006/chart" xmlns:dgm="http://schemas.openxmlformats.org/drawingml/2006/diagram" xmlns:o="urn:schemas-microsoft-com:office:office" xmlns:v="urn:schemas-microsoft-com:vml" xmlns:pvml="urn:schemas-microsoft-com:office:powerpoint" xmlns:com="http://schemas.openxmlformats.org/drawingml/2006/compatibility" xmlns:p14="http://schemas.microsoft.com/office/powerpoint/2010/main" xmlns:p15="http://schemas.microsoft.com/office/powerpoint/2012/main" xmlns:ahyp="http://schemas.microsoft.com/office/drawing/2018/hyperlinkcolor">
-  <p:cSld>
-    <p:spTree>
-      <p:nvGrpSpPr>
-        <p:cNvPr id="248" name="Shape 248"/>
-        <p:cNvGrpSpPr/>
-        <p:nvPr/>
-      </p:nvGrpSpPr>
-      <p:grpSpPr>
-        <a:xfrm>
-          <a:off x="0" y="0"/>
-          <a:ext cx="0" cy="0"/>
-          <a:chOff x="0" y="0"/>
-          <a:chExt cx="0" cy="0"/>
-        </a:xfrm>
-      </p:grpSpPr>
-      <p:sp>
-        <p:nvSpPr>
-          <p:cNvPr id="249" name="Google Shape;249;g3bbeee67e43_0_93"/>
-          <p:cNvSpPr txBox="1"/>
-          <p:nvPr>
-            <p:ph type="title"/>
-          </p:nvPr>
-        </p:nvSpPr>
-        <p:spPr>
-          <a:xfrm>
-            <a:off x="457200" y="274638"/>
-            <a:ext cx="8229600" cy="1143000"/>
-          </a:xfrm>
-          <a:prstGeom prst="rect">
-            <a:avLst/>
-          </a:prstGeom>
-        </p:spPr>
-        <p:txBody>
-          <a:bodyPr anchorCtr="0" anchor="b" bIns="91425" lIns="91425" spcFirstLastPara="1" rIns="91425" wrap="square" tIns="91425">
-            <a:noAutofit/>
-          </a:bodyPr>
-          <a:lstStyle/>
-          <a:p>
-            <a:pPr indent="0" lvl="0" marL="0" rtl="0" algn="l">
-              <a:spcBef>
-                <a:spcPts val="0"/>
-              </a:spcBef>
-              <a:spcAft>
-                <a:spcPts val="0"/>
-              </a:spcAft>
-              <a:buNone/>
-            </a:pPr>
-            <a:r>
-              <a:rPr lang="en"/>
-              <a:t>Space - Embeddings</a:t>
-            </a:r>
-            <a:endParaRPr/>
-          </a:p>
-        </p:txBody>
-      </p:sp>
-      <p:sp>
-        <p:nvSpPr>
-          <p:cNvPr id="250" name="Google Shape;250;g3bbeee67e43_0_93"/>
-          <p:cNvSpPr txBox="1"/>
-          <p:nvPr>
-            <p:ph idx="1" type="body"/>
-          </p:nvPr>
-        </p:nvSpPr>
-        <p:spPr>
-          <a:xfrm>
-            <a:off x="457200" y="1600200"/>
-            <a:ext cx="8229600" cy="4967700"/>
-          </a:xfrm>
-          <a:prstGeom prst="rect">
-            <a:avLst/>
-          </a:prstGeom>
-        </p:spPr>
-        <p:txBody>
-          <a:bodyPr anchorCtr="0" anchor="t" bIns="91425" lIns="91425" spcFirstLastPara="1" rIns="91425" wrap="square" tIns="91425">
-            <a:noAutofit/>
-          </a:bodyPr>
-          <a:lstStyle/>
-          <a:p>
-            <a:pPr indent="0" lvl="0" marL="0" rtl="0" algn="l">
-              <a:spcBef>
-                <a:spcPts val="600"/>
-              </a:spcBef>
-              <a:spcAft>
-                <a:spcPts val="0"/>
-              </a:spcAft>
-              <a:buNone/>
-            </a:pPr>
-            <a:r>
-              <a:t/>
-            </a:r>
-            <a:endParaRPr/>
-          </a:p>
-        </p:txBody>
-      </p:sp>
     </p:spTree>
   </p:cSld>
   <p:clrMapOvr>
@@ -18697,6 +16050,285 @@
 </file>
 
 <file path=ppt/theme/theme1.xml><?xml version="1.0" encoding="utf-8"?>
+<a:theme xmlns:a="http://schemas.openxmlformats.org/drawingml/2006/main" xmlns:r="http://schemas.openxmlformats.org/officeDocument/2006/relationships">
+  <a:themeElements>
+    <a:clrScheme name="Default">
+      <a:dk1>
+        <a:srgbClr val="000000"/>
+      </a:dk1>
+      <a:lt1>
+        <a:srgbClr val="FFFFFF"/>
+      </a:lt1>
+      <a:dk2>
+        <a:srgbClr val="158158"/>
+      </a:dk2>
+      <a:lt2>
+        <a:srgbClr val="F3F3F3"/>
+      </a:lt2>
+      <a:accent1>
+        <a:srgbClr val="058DC7"/>
+      </a:accent1>
+      <a:accent2>
+        <a:srgbClr val="50B432"/>
+      </a:accent2>
+      <a:accent3>
+        <a:srgbClr val="ED561B"/>
+      </a:accent3>
+      <a:accent4>
+        <a:srgbClr val="EDEF00"/>
+      </a:accent4>
+      <a:accent5>
+        <a:srgbClr val="24CBE5"/>
+      </a:accent5>
+      <a:accent6>
+        <a:srgbClr val="64E572"/>
+      </a:accent6>
+      <a:hlink>
+        <a:srgbClr val="2200CC"/>
+      </a:hlink>
+      <a:folHlink>
+        <a:srgbClr val="551A8B"/>
+      </a:folHlink>
+    </a:clrScheme>
+    <a:fontScheme name="Office">
+      <a:majorFont>
+        <a:latin typeface="Arial"/>
+        <a:ea typeface=""/>
+        <a:cs typeface=""/>
+        <a:font script="Jpan" typeface="ＭＳ Ｐゴシック"/>
+        <a:font script="Hang" typeface="맑은 고딕"/>
+        <a:font script="Hans" typeface="宋体"/>
+        <a:font script="Hant" typeface="新細明體"/>
+        <a:font script="Arab" typeface="Times New Roman"/>
+        <a:font script="Hebr" typeface="Times New Roman"/>
+        <a:font script="Thai" typeface="Angsana New"/>
+        <a:font script="Ethi" typeface="Nyala"/>
+        <a:font script="Beng" typeface="Vrinda"/>
+        <a:font script="Gujr" typeface="Shruti"/>
+        <a:font script="Khmr" typeface="MoolBoran"/>
+        <a:font script="Knda" typeface="Tunga"/>
+        <a:font script="Guru" typeface="Raavi"/>
+        <a:font script="Cans" typeface="Euphemia"/>
+        <a:font script="Cher" typeface="Plantagenet Cherokee"/>
+        <a:font script="Yiii" typeface="Microsoft Yi Baiti"/>
+        <a:font script="Tibt" typeface="Microsoft Himalaya"/>
+        <a:font script="Thaa" typeface="MV Boli"/>
+        <a:font script="Deva" typeface="Mangal"/>
+        <a:font script="Telu" typeface="Gautami"/>
+        <a:font script="Taml" typeface="Latha"/>
+        <a:font script="Syrc" typeface="Estrangelo Edessa"/>
+        <a:font script="Orya" typeface="Kalinga"/>
+        <a:font script="Mlym" typeface="Kartika"/>
+        <a:font script="Laoo" typeface="DokChampa"/>
+        <a:font script="Sinh" typeface="Iskoola Pota"/>
+        <a:font script="Mong" typeface="Mongolian Baiti"/>
+        <a:font script="Viet" typeface="Times New Roman"/>
+        <a:font script="Uigh" typeface="Microsoft Uighur"/>
+        <a:font script="Geor" typeface="Sylfaen"/>
+      </a:majorFont>
+      <a:minorFont>
+        <a:latin typeface="Arial"/>
+        <a:ea typeface=""/>
+        <a:cs typeface=""/>
+        <a:font script="Jpan" typeface="ＭＳ Ｐゴシック"/>
+        <a:font script="Hang" typeface="맑은 고딕"/>
+        <a:font script="Hans" typeface="宋体"/>
+        <a:font script="Hant" typeface="新細明體"/>
+        <a:font script="Arab" typeface="Arial"/>
+        <a:font script="Hebr" typeface="Arial"/>
+        <a:font script="Thai" typeface="Cordia New"/>
+        <a:font script="Ethi" typeface="Nyala"/>
+        <a:font script="Beng" typeface="Vrinda"/>
+        <a:font script="Gujr" typeface="Shruti"/>
+        <a:font script="Khmr" typeface="DaunPenh"/>
+        <a:font script="Knda" typeface="Tunga"/>
+        <a:font script="Guru" typeface="Raavi"/>
+        <a:font script="Cans" typeface="Euphemia"/>
+        <a:font script="Cher" typeface="Plantagenet Cherokee"/>
+        <a:font script="Yiii" typeface="Microsoft Yi Baiti"/>
+        <a:font script="Tibt" typeface="Microsoft Himalaya"/>
+        <a:font script="Thaa" typeface="MV Boli"/>
+        <a:font script="Deva" typeface="Mangal"/>
+        <a:font script="Telu" typeface="Gautami"/>
+        <a:font script="Taml" typeface="Latha"/>
+        <a:font script="Syrc" typeface="Estrangelo Edessa"/>
+        <a:font script="Orya" typeface="Kalinga"/>
+        <a:font script="Mlym" typeface="Kartika"/>
+        <a:font script="Laoo" typeface="DokChampa"/>
+        <a:font script="Sinh" typeface="Iskoola Pota"/>
+        <a:font script="Mong" typeface="Mongolian Baiti"/>
+        <a:font script="Viet" typeface="Arial"/>
+        <a:font script="Uigh" typeface="Microsoft Uighur"/>
+        <a:font script="Geor" typeface="Sylfaen"/>
+      </a:minorFont>
+    </a:fontScheme>
+    <a:fmtScheme name="Office">
+      <a:fillStyleLst>
+        <a:solidFill>
+          <a:schemeClr val="phClr"/>
+        </a:solidFill>
+        <a:gradFill rotWithShape="1">
+          <a:gsLst>
+            <a:gs pos="0">
+              <a:schemeClr val="phClr">
+                <a:tint val="50000"/>
+                <a:satMod val="300000"/>
+              </a:schemeClr>
+            </a:gs>
+            <a:gs pos="35000">
+              <a:schemeClr val="phClr">
+                <a:tint val="37000"/>
+                <a:satMod val="300000"/>
+              </a:schemeClr>
+            </a:gs>
+            <a:gs pos="100000">
+              <a:schemeClr val="phClr">
+                <a:tint val="15000"/>
+                <a:satMod val="350000"/>
+              </a:schemeClr>
+            </a:gs>
+          </a:gsLst>
+          <a:lin ang="16200000" scaled="1"/>
+        </a:gradFill>
+        <a:gradFill rotWithShape="1">
+          <a:gsLst>
+            <a:gs pos="0">
+              <a:schemeClr val="phClr">
+                <a:tint val="100000"/>
+                <a:shade val="100000"/>
+                <a:satMod val="130000"/>
+              </a:schemeClr>
+            </a:gs>
+            <a:gs pos="100000">
+              <a:schemeClr val="phClr">
+                <a:tint val="50000"/>
+                <a:shade val="100000"/>
+                <a:satMod val="350000"/>
+              </a:schemeClr>
+            </a:gs>
+          </a:gsLst>
+          <a:lin ang="16200000" scaled="0"/>
+        </a:gradFill>
+      </a:fillStyleLst>
+      <a:lnStyleLst>
+        <a:ln w="9525" cap="flat" cmpd="sng" algn="ctr">
+          <a:solidFill>
+            <a:schemeClr val="phClr">
+              <a:shade val="95000"/>
+              <a:satMod val="105000"/>
+            </a:schemeClr>
+          </a:solidFill>
+          <a:prstDash val="solid"/>
+        </a:ln>
+        <a:ln w="25400" cap="flat" cmpd="sng" algn="ctr">
+          <a:solidFill>
+            <a:schemeClr val="phClr"/>
+          </a:solidFill>
+          <a:prstDash val="solid"/>
+        </a:ln>
+        <a:ln w="38100" cap="flat" cmpd="sng" algn="ctr">
+          <a:solidFill>
+            <a:schemeClr val="phClr"/>
+          </a:solidFill>
+          <a:prstDash val="solid"/>
+        </a:ln>
+      </a:lnStyleLst>
+      <a:effectStyleLst>
+        <a:effectStyle>
+          <a:effectLst>
+            <a:outerShdw blurRad="40000" dist="20000" dir="5400000" rotWithShape="0">
+              <a:srgbClr val="000000">
+                <a:alpha val="38000"/>
+              </a:srgbClr>
+            </a:outerShdw>
+          </a:effectLst>
+        </a:effectStyle>
+        <a:effectStyle>
+          <a:effectLst>
+            <a:outerShdw blurRad="40000" dist="23000" dir="5400000" rotWithShape="0">
+              <a:srgbClr val="000000">
+                <a:alpha val="35000"/>
+              </a:srgbClr>
+            </a:outerShdw>
+          </a:effectLst>
+        </a:effectStyle>
+        <a:effectStyle>
+          <a:effectLst>
+            <a:outerShdw blurRad="40000" dist="23000" dir="5400000" rotWithShape="0">
+              <a:srgbClr val="000000">
+                <a:alpha val="35000"/>
+              </a:srgbClr>
+            </a:outerShdw>
+          </a:effectLst>
+          <a:scene3d>
+            <a:camera prst="orthographicFront">
+              <a:rot lat="0" lon="0" rev="0"/>
+            </a:camera>
+            <a:lightRig rig="threePt" dir="t">
+              <a:rot lat="0" lon="0" rev="1200000"/>
+            </a:lightRig>
+          </a:scene3d>
+          <a:sp3d>
+            <a:bevelT w="63500" h="25400"/>
+          </a:sp3d>
+        </a:effectStyle>
+      </a:effectStyleLst>
+      <a:bgFillStyleLst>
+        <a:solidFill>
+          <a:schemeClr val="phClr"/>
+        </a:solidFill>
+        <a:gradFill rotWithShape="1">
+          <a:gsLst>
+            <a:gs pos="0">
+              <a:schemeClr val="phClr">
+                <a:tint val="40000"/>
+                <a:satMod val="350000"/>
+              </a:schemeClr>
+            </a:gs>
+            <a:gs pos="40000">
+              <a:schemeClr val="phClr">
+                <a:tint val="45000"/>
+                <a:shade val="99000"/>
+                <a:satMod val="350000"/>
+              </a:schemeClr>
+            </a:gs>
+            <a:gs pos="100000">
+              <a:schemeClr val="phClr">
+                <a:shade val="20000"/>
+                <a:satMod val="255000"/>
+              </a:schemeClr>
+            </a:gs>
+          </a:gsLst>
+          <a:path path="circle">
+            <a:fillToRect l="50000" t="-80000" r="50000" b="180000"/>
+          </a:path>
+        </a:gradFill>
+        <a:gradFill rotWithShape="1">
+          <a:gsLst>
+            <a:gs pos="0">
+              <a:schemeClr val="phClr">
+                <a:tint val="80000"/>
+                <a:satMod val="300000"/>
+              </a:schemeClr>
+            </a:gs>
+            <a:gs pos="100000">
+              <a:schemeClr val="phClr">
+                <a:shade val="30000"/>
+                <a:satMod val="200000"/>
+              </a:schemeClr>
+            </a:gs>
+          </a:gsLst>
+          <a:path path="circle">
+            <a:fillToRect l="50000" t="50000" r="50000" b="50000"/>
+          </a:path>
+        </a:gradFill>
+      </a:bgFillStyleLst>
+    </a:fmtScheme>
+  </a:themeElements>
+</a:theme>
+</file>
+
+<file path=ppt/theme/theme2.xml><?xml version="1.0" encoding="utf-8"?>
 <a:theme xmlns:a="http://schemas.openxmlformats.org/drawingml/2006/main" xmlns:r="http://schemas.openxmlformats.org/officeDocument/2006/relationships" name="PB Theme">
   <a:themeElements>
     <a:clrScheme name="Custom 347">
@@ -18973,283 +16605,4 @@
     </a:fmtScheme>
   </a:themeElements>
 </a:theme>
-</file>
-
-<file path=ppt/theme/theme2.xml><?xml version="1.0" encoding="utf-8"?>
-<a:theme xmlns:a="http://schemas.openxmlformats.org/drawingml/2006/main" xmlns:r="http://schemas.openxmlformats.org/officeDocument/2006/relationships">
-  <a:themeElements>
-    <a:clrScheme name="Default">
-      <a:dk1>
-        <a:srgbClr val="000000"/>
-      </a:dk1>
-      <a:lt1>
-        <a:srgbClr val="FFFFFF"/>
-      </a:lt1>
-      <a:dk2>
-        <a:srgbClr val="158158"/>
-      </a:dk2>
-      <a:lt2>
-        <a:srgbClr val="F3F3F3"/>
-      </a:lt2>
-      <a:accent1>
-        <a:srgbClr val="058DC7"/>
-      </a:accent1>
-      <a:accent2>
-        <a:srgbClr val="50B432"/>
-      </a:accent2>
-      <a:accent3>
-        <a:srgbClr val="ED561B"/>
-      </a:accent3>
-      <a:accent4>
-        <a:srgbClr val="EDEF00"/>
-      </a:accent4>
-      <a:accent5>
-        <a:srgbClr val="24CBE5"/>
-      </a:accent5>
-      <a:accent6>
-        <a:srgbClr val="64E572"/>
-      </a:accent6>
-      <a:hlink>
-        <a:srgbClr val="2200CC"/>
-      </a:hlink>
-      <a:folHlink>
-        <a:srgbClr val="551A8B"/>
-      </a:folHlink>
-    </a:clrScheme>
-    <a:fontScheme name="Office">
-      <a:majorFont>
-        <a:latin typeface="Arial"/>
-        <a:ea typeface=""/>
-        <a:cs typeface=""/>
-        <a:font script="Jpan" typeface="ＭＳ Ｐゴシック"/>
-        <a:font script="Hang" typeface="맑은 고딕"/>
-        <a:font script="Hans" typeface="宋体"/>
-        <a:font script="Hant" typeface="新細明體"/>
-        <a:font script="Arab" typeface="Times New Roman"/>
-        <a:font script="Hebr" typeface="Times New Roman"/>
-        <a:font script="Thai" typeface="Angsana New"/>
-        <a:font script="Ethi" typeface="Nyala"/>
-        <a:font script="Beng" typeface="Vrinda"/>
-        <a:font script="Gujr" typeface="Shruti"/>
-        <a:font script="Khmr" typeface="MoolBoran"/>
-        <a:font script="Knda" typeface="Tunga"/>
-        <a:font script="Guru" typeface="Raavi"/>
-        <a:font script="Cans" typeface="Euphemia"/>
-        <a:font script="Cher" typeface="Plantagenet Cherokee"/>
-        <a:font script="Yiii" typeface="Microsoft Yi Baiti"/>
-        <a:font script="Tibt" typeface="Microsoft Himalaya"/>
-        <a:font script="Thaa" typeface="MV Boli"/>
-        <a:font script="Deva" typeface="Mangal"/>
-        <a:font script="Telu" typeface="Gautami"/>
-        <a:font script="Taml" typeface="Latha"/>
-        <a:font script="Syrc" typeface="Estrangelo Edessa"/>
-        <a:font script="Orya" typeface="Kalinga"/>
-        <a:font script="Mlym" typeface="Kartika"/>
-        <a:font script="Laoo" typeface="DokChampa"/>
-        <a:font script="Sinh" typeface="Iskoola Pota"/>
-        <a:font script="Mong" typeface="Mongolian Baiti"/>
-        <a:font script="Viet" typeface="Times New Roman"/>
-        <a:font script="Uigh" typeface="Microsoft Uighur"/>
-        <a:font script="Geor" typeface="Sylfaen"/>
-      </a:majorFont>
-      <a:minorFont>
-        <a:latin typeface="Arial"/>
-        <a:ea typeface=""/>
-        <a:cs typeface=""/>
-        <a:font script="Jpan" typeface="ＭＳ Ｐゴシック"/>
-        <a:font script="Hang" typeface="맑은 고딕"/>
-        <a:font script="Hans" typeface="宋体"/>
-        <a:font script="Hant" typeface="新細明體"/>
-        <a:font script="Arab" typeface="Arial"/>
-        <a:font script="Hebr" typeface="Arial"/>
-        <a:font script="Thai" typeface="Cordia New"/>
-        <a:font script="Ethi" typeface="Nyala"/>
-        <a:font script="Beng" typeface="Vrinda"/>
-        <a:font script="Gujr" typeface="Shruti"/>
-        <a:font script="Khmr" typeface="DaunPenh"/>
-        <a:font script="Knda" typeface="Tunga"/>
-        <a:font script="Guru" typeface="Raavi"/>
-        <a:font script="Cans" typeface="Euphemia"/>
-        <a:font script="Cher" typeface="Plantagenet Cherokee"/>
-        <a:font script="Yiii" typeface="Microsoft Yi Baiti"/>
-        <a:font script="Tibt" typeface="Microsoft Himalaya"/>
-        <a:font script="Thaa" typeface="MV Boli"/>
-        <a:font script="Deva" typeface="Mangal"/>
-        <a:font script="Telu" typeface="Gautami"/>
-        <a:font script="Taml" typeface="Latha"/>
-        <a:font script="Syrc" typeface="Estrangelo Edessa"/>
-        <a:font script="Orya" typeface="Kalinga"/>
-        <a:font script="Mlym" typeface="Kartika"/>
-        <a:font script="Laoo" typeface="DokChampa"/>
-        <a:font script="Sinh" typeface="Iskoola Pota"/>
-        <a:font script="Mong" typeface="Mongolian Baiti"/>
-        <a:font script="Viet" typeface="Arial"/>
-        <a:font script="Uigh" typeface="Microsoft Uighur"/>
-        <a:font script="Geor" typeface="Sylfaen"/>
-      </a:minorFont>
-    </a:fontScheme>
-    <a:fmtScheme name="Office">
-      <a:fillStyleLst>
-        <a:solidFill>
-          <a:schemeClr val="phClr"/>
-        </a:solidFill>
-        <a:gradFill rotWithShape="1">
-          <a:gsLst>
-            <a:gs pos="0">
-              <a:schemeClr val="phClr">
-                <a:tint val="50000"/>
-                <a:satMod val="300000"/>
-              </a:schemeClr>
-            </a:gs>
-            <a:gs pos="35000">
-              <a:schemeClr val="phClr">
-                <a:tint val="37000"/>
-                <a:satMod val="300000"/>
-              </a:schemeClr>
-            </a:gs>
-            <a:gs pos="100000">
-              <a:schemeClr val="phClr">
-                <a:tint val="15000"/>
-                <a:satMod val="350000"/>
-              </a:schemeClr>
-            </a:gs>
-          </a:gsLst>
-          <a:lin ang="16200000" scaled="1"/>
-        </a:gradFill>
-        <a:gradFill rotWithShape="1">
-          <a:gsLst>
-            <a:gs pos="0">
-              <a:schemeClr val="phClr">
-                <a:tint val="100000"/>
-                <a:shade val="100000"/>
-                <a:satMod val="130000"/>
-              </a:schemeClr>
-            </a:gs>
-            <a:gs pos="100000">
-              <a:schemeClr val="phClr">
-                <a:tint val="50000"/>
-                <a:shade val="100000"/>
-                <a:satMod val="350000"/>
-              </a:schemeClr>
-            </a:gs>
-          </a:gsLst>
-          <a:lin ang="16200000" scaled="0"/>
-        </a:gradFill>
-      </a:fillStyleLst>
-      <a:lnStyleLst>
-        <a:ln w="9525" cap="flat" cmpd="sng" algn="ctr">
-          <a:solidFill>
-            <a:schemeClr val="phClr">
-              <a:shade val="95000"/>
-              <a:satMod val="105000"/>
-            </a:schemeClr>
-          </a:solidFill>
-          <a:prstDash val="solid"/>
-        </a:ln>
-        <a:ln w="25400" cap="flat" cmpd="sng" algn="ctr">
-          <a:solidFill>
-            <a:schemeClr val="phClr"/>
-          </a:solidFill>
-          <a:prstDash val="solid"/>
-        </a:ln>
-        <a:ln w="38100" cap="flat" cmpd="sng" algn="ctr">
-          <a:solidFill>
-            <a:schemeClr val="phClr"/>
-          </a:solidFill>
-          <a:prstDash val="solid"/>
-        </a:ln>
-      </a:lnStyleLst>
-      <a:effectStyleLst>
-        <a:effectStyle>
-          <a:effectLst>
-            <a:outerShdw blurRad="40000" dist="20000" dir="5400000" rotWithShape="0">
-              <a:srgbClr val="000000">
-                <a:alpha val="38000"/>
-              </a:srgbClr>
-            </a:outerShdw>
-          </a:effectLst>
-        </a:effectStyle>
-        <a:effectStyle>
-          <a:effectLst>
-            <a:outerShdw blurRad="40000" dist="23000" dir="5400000" rotWithShape="0">
-              <a:srgbClr val="000000">
-                <a:alpha val="35000"/>
-              </a:srgbClr>
-            </a:outerShdw>
-          </a:effectLst>
-        </a:effectStyle>
-        <a:effectStyle>
-          <a:effectLst>
-            <a:outerShdw blurRad="40000" dist="23000" dir="5400000" rotWithShape="0">
-              <a:srgbClr val="000000">
-                <a:alpha val="35000"/>
-              </a:srgbClr>
-            </a:outerShdw>
-          </a:effectLst>
-          <a:scene3d>
-            <a:camera prst="orthographicFront">
-              <a:rot lat="0" lon="0" rev="0"/>
-            </a:camera>
-            <a:lightRig rig="threePt" dir="t">
-              <a:rot lat="0" lon="0" rev="1200000"/>
-            </a:lightRig>
-          </a:scene3d>
-          <a:sp3d>
-            <a:bevelT w="63500" h="25400"/>
-          </a:sp3d>
-        </a:effectStyle>
-      </a:effectStyleLst>
-      <a:bgFillStyleLst>
-        <a:solidFill>
-          <a:schemeClr val="phClr"/>
-        </a:solidFill>
-        <a:gradFill rotWithShape="1">
-          <a:gsLst>
-            <a:gs pos="0">
-              <a:schemeClr val="phClr">
-                <a:tint val="40000"/>
-                <a:satMod val="350000"/>
-              </a:schemeClr>
-            </a:gs>
-            <a:gs pos="40000">
-              <a:schemeClr val="phClr">
-                <a:tint val="45000"/>
-                <a:shade val="99000"/>
-                <a:satMod val="350000"/>
-              </a:schemeClr>
-            </a:gs>
-            <a:gs pos="100000">
-              <a:schemeClr val="phClr">
-                <a:shade val="20000"/>
-                <a:satMod val="255000"/>
-              </a:schemeClr>
-            </a:gs>
-          </a:gsLst>
-          <a:path path="circle">
-            <a:fillToRect l="50000" t="-80000" r="50000" b="180000"/>
-          </a:path>
-        </a:gradFill>
-        <a:gradFill rotWithShape="1">
-          <a:gsLst>
-            <a:gs pos="0">
-              <a:schemeClr val="phClr">
-                <a:tint val="80000"/>
-                <a:satMod val="300000"/>
-              </a:schemeClr>
-            </a:gs>
-            <a:gs pos="100000">
-              <a:schemeClr val="phClr">
-                <a:shade val="30000"/>
-                <a:satMod val="200000"/>
-              </a:schemeClr>
-            </a:gs>
-          </a:gsLst>
-          <a:path path="circle">
-            <a:fillToRect l="50000" t="50000" r="50000" b="50000"/>
-          </a:path>
-        </a:gradFill>
-      </a:bgFillStyleLst>
-    </a:fmtScheme>
-  </a:themeElements>
-</a:theme>
 </file>